--- a/神羔羊.pptx
+++ b/神羔羊.pptx
@@ -2,18 +2,22 @@
 <file path=ppt/presentation.xml><?xml version="1.0" encoding="utf-8"?>
 <p:presentation xmlns:a="http://schemas.openxmlformats.org/drawingml/2006/main" xmlns:r="http://schemas.openxmlformats.org/officeDocument/2006/relationships" xmlns:p="http://schemas.openxmlformats.org/presentationml/2006/main" saveSubsetFonts="1">
   <p:sldMasterIdLst>
-    <p:sldMasterId id="2147483660" r:id="rId1"/>
+    <p:sldMasterId id="2147483672" r:id="rId1"/>
   </p:sldMasterIdLst>
   <p:sldIdLst>
-    <p:sldId id="256" r:id="rId2"/>
-    <p:sldId id="257" r:id="rId3"/>
-    <p:sldId id="258" r:id="rId4"/>
+    <p:sldId id="616" r:id="rId2"/>
+    <p:sldId id="617" r:id="rId3"/>
+    <p:sldId id="618" r:id="rId4"/>
+    <p:sldId id="619" r:id="rId5"/>
+    <p:sldId id="620" r:id="rId6"/>
+    <p:sldId id="621" r:id="rId7"/>
+    <p:sldId id="622" r:id="rId8"/>
   </p:sldIdLst>
-  <p:sldSz cx="9144000" cy="6858000" type="screen4x3"/>
+  <p:sldSz cx="12192000" cy="6858000"/>
   <p:notesSz cx="6858000" cy="9144000"/>
   <p:defaultTextStyle>
     <a:defPPr>
-      <a:defRPr lang="zh-TW"/>
+      <a:defRPr lang="vi-VN"/>
     </a:defPPr>
     <a:lvl1pPr marL="0" algn="l" defTabSz="914400" rtl="0" eaLnBrk="1" latinLnBrk="0" hangingPunct="1">
       <a:defRPr sz="1800" kern="1200">
@@ -106,6 +110,22 @@
       </a:defRPr>
     </a:lvl9pPr>
   </p:defaultTextStyle>
+  <p:extLst>
+    <p:ext uri="{EFAFB233-063F-42B5-8137-9DF3F51BA10A}">
+      <p15:sldGuideLst xmlns:p15="http://schemas.microsoft.com/office/powerpoint/2012/main">
+        <p15:guide id="1" orient="horz" pos="2160" userDrawn="1">
+          <p15:clr>
+            <a:srgbClr val="A4A3A4"/>
+          </p15:clr>
+        </p15:guide>
+        <p15:guide id="2" pos="3840" userDrawn="1">
+          <p15:clr>
+            <a:srgbClr val="A4A3A4"/>
+          </p15:clr>
+        </p15:guide>
+      </p15:sldGuideLst>
+    </p:ext>
+  </p:extLst>
 </p:presentation>
 </file>
 
@@ -128,7 +148,7 @@
       </p:grpSpPr>
       <p:sp>
         <p:nvSpPr>
-          <p:cNvPr id="2" name="Title 1"/>
+          <p:cNvPr id="2" name="標題 1"/>
           <p:cNvSpPr>
             <a:spLocks noGrp="1"/>
           </p:cNvSpPr>
@@ -138,8 +158,8 @@
         </p:nvSpPr>
         <p:spPr>
           <a:xfrm>
-            <a:off x="685800" y="2130425"/>
-            <a:ext cx="7772400" cy="1470025"/>
+            <a:off x="914400" y="2130430"/>
+            <a:ext cx="10363200" cy="1470025"/>
           </a:xfrm>
         </p:spPr>
         <p:txBody>
@@ -147,16 +167,16 @@
           <a:lstStyle/>
           <a:p>
             <a:r>
-              <a:rPr lang="zh-TW" altLang="en-US" smtClean="0"/>
-              <a:t>按一下以編輯母片標題樣式</a:t>
-            </a:r>
-            <a:endParaRPr lang="en-US"/>
-          </a:p>
-        </p:txBody>
-      </p:sp>
-      <p:sp>
-        <p:nvSpPr>
-          <p:cNvPr id="3" name="Subtitle 2"/>
+              <a:rPr lang="en-US" altLang="zh-TW"/>
+              <a:t>Click to edit Master title style</a:t>
+            </a:r>
+            <a:endParaRPr lang="zh-TW" altLang="en-US"/>
+          </a:p>
+        </p:txBody>
+      </p:sp>
+      <p:sp>
+        <p:nvSpPr>
+          <p:cNvPr id="3" name="副標題 2"/>
           <p:cNvSpPr>
             <a:spLocks noGrp="1"/>
           </p:cNvSpPr>
@@ -166,8 +186,8 @@
         </p:nvSpPr>
         <p:spPr>
           <a:xfrm>
-            <a:off x="1371600" y="3886200"/>
-            <a:ext cx="6400800" cy="1752600"/>
+            <a:off x="1828800" y="3886200"/>
+            <a:ext cx="8534400" cy="1752600"/>
           </a:xfrm>
         </p:spPr>
         <p:txBody>
@@ -183,7 +203,7 @@
                 </a:solidFill>
               </a:defRPr>
             </a:lvl1pPr>
-            <a:lvl2pPr marL="457200" indent="0" algn="ctr">
+            <a:lvl2pPr marL="457189" indent="0" algn="ctr">
               <a:buNone/>
               <a:defRPr>
                 <a:solidFill>
@@ -193,7 +213,7 @@
                 </a:solidFill>
               </a:defRPr>
             </a:lvl2pPr>
-            <a:lvl3pPr marL="914400" indent="0" algn="ctr">
+            <a:lvl3pPr marL="914378" indent="0" algn="ctr">
               <a:buNone/>
               <a:defRPr>
                 <a:solidFill>
@@ -203,7 +223,7 @@
                 </a:solidFill>
               </a:defRPr>
             </a:lvl3pPr>
-            <a:lvl4pPr marL="1371600" indent="0" algn="ctr">
+            <a:lvl4pPr marL="1371566" indent="0" algn="ctr">
               <a:buNone/>
               <a:defRPr>
                 <a:solidFill>
@@ -213,7 +233,7 @@
                 </a:solidFill>
               </a:defRPr>
             </a:lvl4pPr>
-            <a:lvl5pPr marL="1828800" indent="0" algn="ctr">
+            <a:lvl5pPr marL="1828754" indent="0" algn="ctr">
               <a:buNone/>
               <a:defRPr>
                 <a:solidFill>
@@ -223,7 +243,7 @@
                 </a:solidFill>
               </a:defRPr>
             </a:lvl5pPr>
-            <a:lvl6pPr marL="2286000" indent="0" algn="ctr">
+            <a:lvl6pPr marL="2285943" indent="0" algn="ctr">
               <a:buNone/>
               <a:defRPr>
                 <a:solidFill>
@@ -233,7 +253,7 @@
                 </a:solidFill>
               </a:defRPr>
             </a:lvl6pPr>
-            <a:lvl7pPr marL="2743200" indent="0" algn="ctr">
+            <a:lvl7pPr marL="2743132" indent="0" algn="ctr">
               <a:buNone/>
               <a:defRPr>
                 <a:solidFill>
@@ -243,7 +263,7 @@
                 </a:solidFill>
               </a:defRPr>
             </a:lvl7pPr>
-            <a:lvl8pPr marL="3200400" indent="0" algn="ctr">
+            <a:lvl8pPr marL="3200320" indent="0" algn="ctr">
               <a:buNone/>
               <a:defRPr>
                 <a:solidFill>
@@ -253,7 +273,7 @@
                 </a:solidFill>
               </a:defRPr>
             </a:lvl8pPr>
-            <a:lvl9pPr marL="3657600" indent="0" algn="ctr">
+            <a:lvl9pPr marL="3657509" indent="0" algn="ctr">
               <a:buNone/>
               <a:defRPr>
                 <a:solidFill>
@@ -266,16 +286,16 @@
           </a:lstStyle>
           <a:p>
             <a:r>
-              <a:rPr lang="zh-TW" altLang="en-US" smtClean="0"/>
-              <a:t>按一下以編輯母片副標題樣式</a:t>
-            </a:r>
-            <a:endParaRPr lang="en-US"/>
-          </a:p>
-        </p:txBody>
-      </p:sp>
-      <p:sp>
-        <p:nvSpPr>
-          <p:cNvPr id="4" name="Date Placeholder 3"/>
+              <a:rPr lang="en-US" altLang="zh-TW"/>
+              <a:t>Click to edit Master subtitle style</a:t>
+            </a:r>
+            <a:endParaRPr lang="zh-TW" altLang="en-US"/>
+          </a:p>
+        </p:txBody>
+      </p:sp>
+      <p:sp>
+        <p:nvSpPr>
+          <p:cNvPr id="4" name="日期版面配置區 3"/>
           <p:cNvSpPr>
             <a:spLocks noGrp="1"/>
           </p:cNvSpPr>
@@ -286,15 +306,11 @@
         <p:spPr/>
         <p:txBody>
           <a:bodyPr/>
-          <a:lstStyle>
-            <a:lvl1pPr>
-              <a:defRPr/>
-            </a:lvl1pPr>
-          </a:lstStyle>
+          <a:lstStyle/>
           <a:p>
             <a:fld id="{D7BEA608-7224-4CE8-8283-282EDC8021C2}" type="datetimeFigureOut">
               <a:rPr lang="zh-TW" altLang="en-US" smtClean="0"/>
-              <a:t>2014/7/19</a:t>
+              <a:t>2025/4/16</a:t>
             </a:fld>
             <a:endParaRPr lang="zh-TW" altLang="en-US"/>
           </a:p>
@@ -302,7 +318,7 @@
       </p:sp>
       <p:sp>
         <p:nvSpPr>
-          <p:cNvPr id="5" name="Footer Placeholder 4"/>
+          <p:cNvPr id="5" name="頁尾版面配置區 4"/>
           <p:cNvSpPr>
             <a:spLocks noGrp="1"/>
           </p:cNvSpPr>
@@ -313,19 +329,15 @@
         <p:spPr/>
         <p:txBody>
           <a:bodyPr/>
-          <a:lstStyle>
-            <a:lvl1pPr>
-              <a:defRPr/>
-            </a:lvl1pPr>
-          </a:lstStyle>
-          <a:p>
-            <a:endParaRPr lang="zh-TW" altLang="en-US"/>
-          </a:p>
-        </p:txBody>
-      </p:sp>
-      <p:sp>
-        <p:nvSpPr>
-          <p:cNvPr id="6" name="Slide Number Placeholder 5"/>
+          <a:lstStyle/>
+          <a:p>
+            <a:endParaRPr lang="zh-TW" altLang="en-US"/>
+          </a:p>
+        </p:txBody>
+      </p:sp>
+      <p:sp>
+        <p:nvSpPr>
+          <p:cNvPr id="6" name="投影片編號版面配置區 5"/>
           <p:cNvSpPr>
             <a:spLocks noGrp="1"/>
           </p:cNvSpPr>
@@ -336,11 +348,7 @@
         <p:spPr/>
         <p:txBody>
           <a:bodyPr/>
-          <a:lstStyle>
-            <a:lvl1pPr>
-              <a:defRPr/>
-            </a:lvl1pPr>
-          </a:lstStyle>
+          <a:lstStyle/>
           <a:p>
             <a:fld id="{D22BDFD0-99D4-44A5-A06A-7B0304E2794B}" type="slidenum">
               <a:rPr lang="zh-TW" altLang="en-US" smtClean="0"/>
@@ -351,6 +359,11 @@
         </p:txBody>
       </p:sp>
     </p:spTree>
+    <p:extLst>
+      <p:ext uri="{BB962C8B-B14F-4D97-AF65-F5344CB8AC3E}">
+        <p14:creationId xmlns:p14="http://schemas.microsoft.com/office/powerpoint/2010/main" val="3771111170"/>
+      </p:ext>
+    </p:extLst>
   </p:cSld>
   <p:clrMapOvr>
     <a:masterClrMapping/>
@@ -377,7 +390,7 @@
       </p:grpSpPr>
       <p:sp>
         <p:nvSpPr>
-          <p:cNvPr id="2" name="Title 1"/>
+          <p:cNvPr id="2" name="標題 1"/>
           <p:cNvSpPr>
             <a:spLocks noGrp="1"/>
           </p:cNvSpPr>
@@ -391,16 +404,16 @@
           <a:lstStyle/>
           <a:p>
             <a:r>
-              <a:rPr lang="zh-TW" altLang="en-US" smtClean="0"/>
-              <a:t>按一下以編輯母片標題樣式</a:t>
-            </a:r>
-            <a:endParaRPr lang="en-US"/>
-          </a:p>
-        </p:txBody>
-      </p:sp>
-      <p:sp>
-        <p:nvSpPr>
-          <p:cNvPr id="3" name="Vertical Text Placeholder 2"/>
+              <a:rPr lang="en-US" altLang="zh-TW"/>
+              <a:t>Click to edit Master title style</a:t>
+            </a:r>
+            <a:endParaRPr lang="zh-TW" altLang="en-US"/>
+          </a:p>
+        </p:txBody>
+      </p:sp>
+      <p:sp>
+        <p:nvSpPr>
+          <p:cNvPr id="3" name="直排文字版面配置區 2"/>
           <p:cNvSpPr>
             <a:spLocks noGrp="1"/>
           </p:cNvSpPr>
@@ -415,44 +428,44 @@
           <a:p>
             <a:pPr lvl="0"/>
             <a:r>
-              <a:rPr lang="zh-TW" altLang="en-US" smtClean="0"/>
-              <a:t>按一下以編輯母片文字樣式</a:t>
+              <a:rPr lang="en-US" altLang="zh-TW"/>
+              <a:t>Click to edit Master text styles</a:t>
             </a:r>
           </a:p>
           <a:p>
             <a:pPr lvl="1"/>
             <a:r>
-              <a:rPr lang="zh-TW" altLang="en-US" smtClean="0"/>
-              <a:t>第二層</a:t>
+              <a:rPr lang="en-US" altLang="zh-TW"/>
+              <a:t>Second level</a:t>
             </a:r>
           </a:p>
           <a:p>
             <a:pPr lvl="2"/>
             <a:r>
-              <a:rPr lang="zh-TW" altLang="en-US" smtClean="0"/>
-              <a:t>第三層</a:t>
+              <a:rPr lang="en-US" altLang="zh-TW"/>
+              <a:t>Third level</a:t>
             </a:r>
           </a:p>
           <a:p>
             <a:pPr lvl="3"/>
             <a:r>
-              <a:rPr lang="zh-TW" altLang="en-US" smtClean="0"/>
-              <a:t>第四層</a:t>
+              <a:rPr lang="en-US" altLang="zh-TW"/>
+              <a:t>Fourth level</a:t>
             </a:r>
           </a:p>
           <a:p>
             <a:pPr lvl="4"/>
             <a:r>
-              <a:rPr lang="zh-TW" altLang="en-US" smtClean="0"/>
-              <a:t>第五層</a:t>
-            </a:r>
-            <a:endParaRPr lang="en-US"/>
-          </a:p>
-        </p:txBody>
-      </p:sp>
-      <p:sp>
-        <p:nvSpPr>
-          <p:cNvPr id="4" name="Date Placeholder 3"/>
+              <a:rPr lang="en-US" altLang="zh-TW"/>
+              <a:t>Fifth level</a:t>
+            </a:r>
+            <a:endParaRPr lang="zh-TW" altLang="en-US"/>
+          </a:p>
+        </p:txBody>
+      </p:sp>
+      <p:sp>
+        <p:nvSpPr>
+          <p:cNvPr id="4" name="日期版面配置區 3"/>
           <p:cNvSpPr>
             <a:spLocks noGrp="1"/>
           </p:cNvSpPr>
@@ -463,15 +476,11 @@
         <p:spPr/>
         <p:txBody>
           <a:bodyPr/>
-          <a:lstStyle>
-            <a:lvl1pPr>
-              <a:defRPr/>
-            </a:lvl1pPr>
-          </a:lstStyle>
+          <a:lstStyle/>
           <a:p>
             <a:fld id="{D7BEA608-7224-4CE8-8283-282EDC8021C2}" type="datetimeFigureOut">
               <a:rPr lang="zh-TW" altLang="en-US" smtClean="0"/>
-              <a:t>2014/7/19</a:t>
+              <a:t>2025/4/16</a:t>
             </a:fld>
             <a:endParaRPr lang="zh-TW" altLang="en-US"/>
           </a:p>
@@ -479,7 +488,7 @@
       </p:sp>
       <p:sp>
         <p:nvSpPr>
-          <p:cNvPr id="5" name="Footer Placeholder 4"/>
+          <p:cNvPr id="5" name="頁尾版面配置區 4"/>
           <p:cNvSpPr>
             <a:spLocks noGrp="1"/>
           </p:cNvSpPr>
@@ -490,19 +499,15 @@
         <p:spPr/>
         <p:txBody>
           <a:bodyPr/>
-          <a:lstStyle>
-            <a:lvl1pPr>
-              <a:defRPr/>
-            </a:lvl1pPr>
-          </a:lstStyle>
-          <a:p>
-            <a:endParaRPr lang="zh-TW" altLang="en-US"/>
-          </a:p>
-        </p:txBody>
-      </p:sp>
-      <p:sp>
-        <p:nvSpPr>
-          <p:cNvPr id="6" name="Slide Number Placeholder 5"/>
+          <a:lstStyle/>
+          <a:p>
+            <a:endParaRPr lang="zh-TW" altLang="en-US"/>
+          </a:p>
+        </p:txBody>
+      </p:sp>
+      <p:sp>
+        <p:nvSpPr>
+          <p:cNvPr id="6" name="投影片編號版面配置區 5"/>
           <p:cNvSpPr>
             <a:spLocks noGrp="1"/>
           </p:cNvSpPr>
@@ -513,11 +518,7 @@
         <p:spPr/>
         <p:txBody>
           <a:bodyPr/>
-          <a:lstStyle>
-            <a:lvl1pPr>
-              <a:defRPr/>
-            </a:lvl1pPr>
-          </a:lstStyle>
+          <a:lstStyle/>
           <a:p>
             <a:fld id="{D22BDFD0-99D4-44A5-A06A-7B0304E2794B}" type="slidenum">
               <a:rPr lang="zh-TW" altLang="en-US" smtClean="0"/>
@@ -528,6 +529,11 @@
         </p:txBody>
       </p:sp>
     </p:spTree>
+    <p:extLst>
+      <p:ext uri="{BB962C8B-B14F-4D97-AF65-F5344CB8AC3E}">
+        <p14:creationId xmlns:p14="http://schemas.microsoft.com/office/powerpoint/2010/main" val="514606727"/>
+      </p:ext>
+    </p:extLst>
   </p:cSld>
   <p:clrMapOvr>
     <a:masterClrMapping/>
@@ -554,7 +560,7 @@
       </p:grpSpPr>
       <p:sp>
         <p:nvSpPr>
-          <p:cNvPr id="2" name="Vertical Title 1"/>
+          <p:cNvPr id="2" name="直排標題 1"/>
           <p:cNvSpPr>
             <a:spLocks noGrp="1"/>
           </p:cNvSpPr>
@@ -564,8 +570,8 @@
         </p:nvSpPr>
         <p:spPr>
           <a:xfrm>
-            <a:off x="6629400" y="274638"/>
-            <a:ext cx="2057400" cy="5851525"/>
+            <a:off x="8839200" y="274641"/>
+            <a:ext cx="2743200" cy="5851525"/>
           </a:xfrm>
         </p:spPr>
         <p:txBody>
@@ -573,16 +579,16 @@
           <a:lstStyle/>
           <a:p>
             <a:r>
-              <a:rPr lang="zh-TW" altLang="en-US" smtClean="0"/>
-              <a:t>按一下以編輯母片標題樣式</a:t>
-            </a:r>
-            <a:endParaRPr lang="en-US"/>
-          </a:p>
-        </p:txBody>
-      </p:sp>
-      <p:sp>
-        <p:nvSpPr>
-          <p:cNvPr id="3" name="Vertical Text Placeholder 2"/>
+              <a:rPr lang="en-US" altLang="zh-TW"/>
+              <a:t>Click to edit Master title style</a:t>
+            </a:r>
+            <a:endParaRPr lang="zh-TW" altLang="en-US"/>
+          </a:p>
+        </p:txBody>
+      </p:sp>
+      <p:sp>
+        <p:nvSpPr>
+          <p:cNvPr id="3" name="直排文字版面配置區 2"/>
           <p:cNvSpPr>
             <a:spLocks noGrp="1"/>
           </p:cNvSpPr>
@@ -592,8 +598,8 @@
         </p:nvSpPr>
         <p:spPr>
           <a:xfrm>
-            <a:off x="457200" y="274638"/>
-            <a:ext cx="6019800" cy="5851525"/>
+            <a:off x="609600" y="274641"/>
+            <a:ext cx="8026400" cy="5851525"/>
           </a:xfrm>
         </p:spPr>
         <p:txBody>
@@ -602,44 +608,44 @@
           <a:p>
             <a:pPr lvl="0"/>
             <a:r>
-              <a:rPr lang="zh-TW" altLang="en-US" smtClean="0"/>
-              <a:t>按一下以編輯母片文字樣式</a:t>
+              <a:rPr lang="en-US" altLang="zh-TW"/>
+              <a:t>Click to edit Master text styles</a:t>
             </a:r>
           </a:p>
           <a:p>
             <a:pPr lvl="1"/>
             <a:r>
-              <a:rPr lang="zh-TW" altLang="en-US" smtClean="0"/>
-              <a:t>第二層</a:t>
+              <a:rPr lang="en-US" altLang="zh-TW"/>
+              <a:t>Second level</a:t>
             </a:r>
           </a:p>
           <a:p>
             <a:pPr lvl="2"/>
             <a:r>
-              <a:rPr lang="zh-TW" altLang="en-US" smtClean="0"/>
-              <a:t>第三層</a:t>
+              <a:rPr lang="en-US" altLang="zh-TW"/>
+              <a:t>Third level</a:t>
             </a:r>
           </a:p>
           <a:p>
             <a:pPr lvl="3"/>
             <a:r>
-              <a:rPr lang="zh-TW" altLang="en-US" smtClean="0"/>
-              <a:t>第四層</a:t>
+              <a:rPr lang="en-US" altLang="zh-TW"/>
+              <a:t>Fourth level</a:t>
             </a:r>
           </a:p>
           <a:p>
             <a:pPr lvl="4"/>
             <a:r>
-              <a:rPr lang="zh-TW" altLang="en-US" smtClean="0"/>
-              <a:t>第五層</a:t>
-            </a:r>
-            <a:endParaRPr lang="en-US"/>
-          </a:p>
-        </p:txBody>
-      </p:sp>
-      <p:sp>
-        <p:nvSpPr>
-          <p:cNvPr id="4" name="Date Placeholder 3"/>
+              <a:rPr lang="en-US" altLang="zh-TW"/>
+              <a:t>Fifth level</a:t>
+            </a:r>
+            <a:endParaRPr lang="zh-TW" altLang="en-US"/>
+          </a:p>
+        </p:txBody>
+      </p:sp>
+      <p:sp>
+        <p:nvSpPr>
+          <p:cNvPr id="4" name="日期版面配置區 3"/>
           <p:cNvSpPr>
             <a:spLocks noGrp="1"/>
           </p:cNvSpPr>
@@ -650,15 +656,11 @@
         <p:spPr/>
         <p:txBody>
           <a:bodyPr/>
-          <a:lstStyle>
-            <a:lvl1pPr>
-              <a:defRPr/>
-            </a:lvl1pPr>
-          </a:lstStyle>
+          <a:lstStyle/>
           <a:p>
             <a:fld id="{D7BEA608-7224-4CE8-8283-282EDC8021C2}" type="datetimeFigureOut">
               <a:rPr lang="zh-TW" altLang="en-US" smtClean="0"/>
-              <a:t>2014/7/19</a:t>
+              <a:t>2025/4/16</a:t>
             </a:fld>
             <a:endParaRPr lang="zh-TW" altLang="en-US"/>
           </a:p>
@@ -666,7 +668,7 @@
       </p:sp>
       <p:sp>
         <p:nvSpPr>
-          <p:cNvPr id="5" name="Footer Placeholder 4"/>
+          <p:cNvPr id="5" name="頁尾版面配置區 4"/>
           <p:cNvSpPr>
             <a:spLocks noGrp="1"/>
           </p:cNvSpPr>
@@ -677,19 +679,15 @@
         <p:spPr/>
         <p:txBody>
           <a:bodyPr/>
-          <a:lstStyle>
-            <a:lvl1pPr>
-              <a:defRPr/>
-            </a:lvl1pPr>
-          </a:lstStyle>
-          <a:p>
-            <a:endParaRPr lang="zh-TW" altLang="en-US"/>
-          </a:p>
-        </p:txBody>
-      </p:sp>
-      <p:sp>
-        <p:nvSpPr>
-          <p:cNvPr id="6" name="Slide Number Placeholder 5"/>
+          <a:lstStyle/>
+          <a:p>
+            <a:endParaRPr lang="zh-TW" altLang="en-US"/>
+          </a:p>
+        </p:txBody>
+      </p:sp>
+      <p:sp>
+        <p:nvSpPr>
+          <p:cNvPr id="6" name="投影片編號版面配置區 5"/>
           <p:cNvSpPr>
             <a:spLocks noGrp="1"/>
           </p:cNvSpPr>
@@ -700,11 +698,7 @@
         <p:spPr/>
         <p:txBody>
           <a:bodyPr/>
-          <a:lstStyle>
-            <a:lvl1pPr>
-              <a:defRPr/>
-            </a:lvl1pPr>
-          </a:lstStyle>
+          <a:lstStyle/>
           <a:p>
             <a:fld id="{D22BDFD0-99D4-44A5-A06A-7B0304E2794B}" type="slidenum">
               <a:rPr lang="zh-TW" altLang="en-US" smtClean="0"/>
@@ -715,6 +709,11 @@
         </p:txBody>
       </p:sp>
     </p:spTree>
+    <p:extLst>
+      <p:ext uri="{BB962C8B-B14F-4D97-AF65-F5344CB8AC3E}">
+        <p14:creationId xmlns:p14="http://schemas.microsoft.com/office/powerpoint/2010/main" val="407501927"/>
+      </p:ext>
+    </p:extLst>
   </p:cSld>
   <p:clrMapOvr>
     <a:masterClrMapping/>
@@ -741,7 +740,7 @@
       </p:grpSpPr>
       <p:sp>
         <p:nvSpPr>
-          <p:cNvPr id="2" name="Title 1"/>
+          <p:cNvPr id="2" name="標題 1"/>
           <p:cNvSpPr>
             <a:spLocks noGrp="1"/>
           </p:cNvSpPr>
@@ -755,16 +754,16 @@
           <a:lstStyle/>
           <a:p>
             <a:r>
-              <a:rPr lang="zh-TW" altLang="en-US" smtClean="0"/>
-              <a:t>按一下以編輯母片標題樣式</a:t>
-            </a:r>
-            <a:endParaRPr lang="en-US"/>
-          </a:p>
-        </p:txBody>
-      </p:sp>
-      <p:sp>
-        <p:nvSpPr>
-          <p:cNvPr id="3" name="Content Placeholder 2"/>
+              <a:rPr lang="en-US" altLang="zh-TW"/>
+              <a:t>Click to edit Master title style</a:t>
+            </a:r>
+            <a:endParaRPr lang="zh-TW" altLang="en-US"/>
+          </a:p>
+        </p:txBody>
+      </p:sp>
+      <p:sp>
+        <p:nvSpPr>
+          <p:cNvPr id="3" name="內容版面配置區 2"/>
           <p:cNvSpPr>
             <a:spLocks noGrp="1"/>
           </p:cNvSpPr>
@@ -779,44 +778,44 @@
           <a:p>
             <a:pPr lvl="0"/>
             <a:r>
-              <a:rPr lang="zh-TW" altLang="en-US" smtClean="0"/>
-              <a:t>按一下以編輯母片文字樣式</a:t>
+              <a:rPr lang="en-US" altLang="zh-TW"/>
+              <a:t>Click to edit Master text styles</a:t>
             </a:r>
           </a:p>
           <a:p>
             <a:pPr lvl="1"/>
             <a:r>
-              <a:rPr lang="zh-TW" altLang="en-US" smtClean="0"/>
-              <a:t>第二層</a:t>
+              <a:rPr lang="en-US" altLang="zh-TW"/>
+              <a:t>Second level</a:t>
             </a:r>
           </a:p>
           <a:p>
             <a:pPr lvl="2"/>
             <a:r>
-              <a:rPr lang="zh-TW" altLang="en-US" smtClean="0"/>
-              <a:t>第三層</a:t>
+              <a:rPr lang="en-US" altLang="zh-TW"/>
+              <a:t>Third level</a:t>
             </a:r>
           </a:p>
           <a:p>
             <a:pPr lvl="3"/>
             <a:r>
-              <a:rPr lang="zh-TW" altLang="en-US" smtClean="0"/>
-              <a:t>第四層</a:t>
+              <a:rPr lang="en-US" altLang="zh-TW"/>
+              <a:t>Fourth level</a:t>
             </a:r>
           </a:p>
           <a:p>
             <a:pPr lvl="4"/>
             <a:r>
-              <a:rPr lang="zh-TW" altLang="en-US" smtClean="0"/>
-              <a:t>第五層</a:t>
-            </a:r>
-            <a:endParaRPr lang="en-US"/>
-          </a:p>
-        </p:txBody>
-      </p:sp>
-      <p:sp>
-        <p:nvSpPr>
-          <p:cNvPr id="4" name="Date Placeholder 3"/>
+              <a:rPr lang="en-US" altLang="zh-TW"/>
+              <a:t>Fifth level</a:t>
+            </a:r>
+            <a:endParaRPr lang="zh-TW" altLang="en-US"/>
+          </a:p>
+        </p:txBody>
+      </p:sp>
+      <p:sp>
+        <p:nvSpPr>
+          <p:cNvPr id="4" name="日期版面配置區 3"/>
           <p:cNvSpPr>
             <a:spLocks noGrp="1"/>
           </p:cNvSpPr>
@@ -827,15 +826,11 @@
         <p:spPr/>
         <p:txBody>
           <a:bodyPr/>
-          <a:lstStyle>
-            <a:lvl1pPr>
-              <a:defRPr/>
-            </a:lvl1pPr>
-          </a:lstStyle>
+          <a:lstStyle/>
           <a:p>
             <a:fld id="{D7BEA608-7224-4CE8-8283-282EDC8021C2}" type="datetimeFigureOut">
               <a:rPr lang="zh-TW" altLang="en-US" smtClean="0"/>
-              <a:t>2014/7/19</a:t>
+              <a:t>2025/4/16</a:t>
             </a:fld>
             <a:endParaRPr lang="zh-TW" altLang="en-US"/>
           </a:p>
@@ -843,7 +838,7 @@
       </p:sp>
       <p:sp>
         <p:nvSpPr>
-          <p:cNvPr id="5" name="Footer Placeholder 4"/>
+          <p:cNvPr id="5" name="頁尾版面配置區 4"/>
           <p:cNvSpPr>
             <a:spLocks noGrp="1"/>
           </p:cNvSpPr>
@@ -854,19 +849,15 @@
         <p:spPr/>
         <p:txBody>
           <a:bodyPr/>
-          <a:lstStyle>
-            <a:lvl1pPr>
-              <a:defRPr/>
-            </a:lvl1pPr>
-          </a:lstStyle>
-          <a:p>
-            <a:endParaRPr lang="zh-TW" altLang="en-US"/>
-          </a:p>
-        </p:txBody>
-      </p:sp>
-      <p:sp>
-        <p:nvSpPr>
-          <p:cNvPr id="6" name="Slide Number Placeholder 5"/>
+          <a:lstStyle/>
+          <a:p>
+            <a:endParaRPr lang="zh-TW" altLang="en-US"/>
+          </a:p>
+        </p:txBody>
+      </p:sp>
+      <p:sp>
+        <p:nvSpPr>
+          <p:cNvPr id="6" name="投影片編號版面配置區 5"/>
           <p:cNvSpPr>
             <a:spLocks noGrp="1"/>
           </p:cNvSpPr>
@@ -877,11 +868,7 @@
         <p:spPr/>
         <p:txBody>
           <a:bodyPr/>
-          <a:lstStyle>
-            <a:lvl1pPr>
-              <a:defRPr/>
-            </a:lvl1pPr>
-          </a:lstStyle>
+          <a:lstStyle/>
           <a:p>
             <a:fld id="{D22BDFD0-99D4-44A5-A06A-7B0304E2794B}" type="slidenum">
               <a:rPr lang="zh-TW" altLang="en-US" smtClean="0"/>
@@ -892,6 +879,11 @@
         </p:txBody>
       </p:sp>
     </p:spTree>
+    <p:extLst>
+      <p:ext uri="{BB962C8B-B14F-4D97-AF65-F5344CB8AC3E}">
+        <p14:creationId xmlns:p14="http://schemas.microsoft.com/office/powerpoint/2010/main" val="2768155482"/>
+      </p:ext>
+    </p:extLst>
   </p:cSld>
   <p:clrMapOvr>
     <a:masterClrMapping/>
@@ -918,7 +910,7 @@
       </p:grpSpPr>
       <p:sp>
         <p:nvSpPr>
-          <p:cNvPr id="2" name="Title 1"/>
+          <p:cNvPr id="2" name="標題 1"/>
           <p:cNvSpPr>
             <a:spLocks noGrp="1"/>
           </p:cNvSpPr>
@@ -928,8 +920,8 @@
         </p:nvSpPr>
         <p:spPr>
           <a:xfrm>
-            <a:off x="722313" y="4406900"/>
-            <a:ext cx="7772400" cy="1362075"/>
+            <a:off x="963084" y="4406903"/>
+            <a:ext cx="10363200" cy="1362075"/>
           </a:xfrm>
         </p:spPr>
         <p:txBody>
@@ -941,16 +933,16 @@
           </a:lstStyle>
           <a:p>
             <a:r>
-              <a:rPr lang="zh-TW" altLang="en-US" smtClean="0"/>
-              <a:t>按一下以編輯母片標題樣式</a:t>
-            </a:r>
-            <a:endParaRPr lang="en-US"/>
-          </a:p>
-        </p:txBody>
-      </p:sp>
-      <p:sp>
-        <p:nvSpPr>
-          <p:cNvPr id="3" name="Text Placeholder 2"/>
+              <a:rPr lang="en-US" altLang="zh-TW"/>
+              <a:t>Click to edit Master title style</a:t>
+            </a:r>
+            <a:endParaRPr lang="zh-TW" altLang="en-US"/>
+          </a:p>
+        </p:txBody>
+      </p:sp>
+      <p:sp>
+        <p:nvSpPr>
+          <p:cNvPr id="3" name="文字版面配置區 2"/>
           <p:cNvSpPr>
             <a:spLocks noGrp="1"/>
           </p:cNvSpPr>
@@ -960,8 +952,8 @@
         </p:nvSpPr>
         <p:spPr>
           <a:xfrm>
-            <a:off x="722313" y="2906713"/>
-            <a:ext cx="7772400" cy="1500187"/>
+            <a:off x="963084" y="2906713"/>
+            <a:ext cx="10363200" cy="1500187"/>
           </a:xfrm>
         </p:spPr>
         <p:txBody>
@@ -977,7 +969,7 @@
                 </a:solidFill>
               </a:defRPr>
             </a:lvl1pPr>
-            <a:lvl2pPr marL="457200" indent="0">
+            <a:lvl2pPr marL="457189" indent="0">
               <a:buNone/>
               <a:defRPr sz="1800">
                 <a:solidFill>
@@ -987,7 +979,7 @@
                 </a:solidFill>
               </a:defRPr>
             </a:lvl2pPr>
-            <a:lvl3pPr marL="914400" indent="0">
+            <a:lvl3pPr marL="914378" indent="0">
               <a:buNone/>
               <a:defRPr sz="1600">
                 <a:solidFill>
@@ -997,7 +989,7 @@
                 </a:solidFill>
               </a:defRPr>
             </a:lvl3pPr>
-            <a:lvl4pPr marL="1371600" indent="0">
+            <a:lvl4pPr marL="1371566" indent="0">
               <a:buNone/>
               <a:defRPr sz="1400">
                 <a:solidFill>
@@ -1007,7 +999,7 @@
                 </a:solidFill>
               </a:defRPr>
             </a:lvl4pPr>
-            <a:lvl5pPr marL="1828800" indent="0">
+            <a:lvl5pPr marL="1828754" indent="0">
               <a:buNone/>
               <a:defRPr sz="1400">
                 <a:solidFill>
@@ -1017,7 +1009,7 @@
                 </a:solidFill>
               </a:defRPr>
             </a:lvl5pPr>
-            <a:lvl6pPr marL="2286000" indent="0">
+            <a:lvl6pPr marL="2285943" indent="0">
               <a:buNone/>
               <a:defRPr sz="1400">
                 <a:solidFill>
@@ -1027,7 +1019,7 @@
                 </a:solidFill>
               </a:defRPr>
             </a:lvl6pPr>
-            <a:lvl7pPr marL="2743200" indent="0">
+            <a:lvl7pPr marL="2743132" indent="0">
               <a:buNone/>
               <a:defRPr sz="1400">
                 <a:solidFill>
@@ -1037,7 +1029,7 @@
                 </a:solidFill>
               </a:defRPr>
             </a:lvl7pPr>
-            <a:lvl8pPr marL="3200400" indent="0">
+            <a:lvl8pPr marL="3200320" indent="0">
               <a:buNone/>
               <a:defRPr sz="1400">
                 <a:solidFill>
@@ -1047,7 +1039,7 @@
                 </a:solidFill>
               </a:defRPr>
             </a:lvl8pPr>
-            <a:lvl9pPr marL="3657600" indent="0">
+            <a:lvl9pPr marL="3657509" indent="0">
               <a:buNone/>
               <a:defRPr sz="1400">
                 <a:solidFill>
@@ -1061,15 +1053,15 @@
           <a:p>
             <a:pPr lvl="0"/>
             <a:r>
-              <a:rPr lang="zh-TW" altLang="en-US" smtClean="0"/>
-              <a:t>按一下以編輯母片文字樣式</a:t>
-            </a:r>
-          </a:p>
-        </p:txBody>
-      </p:sp>
-      <p:sp>
-        <p:nvSpPr>
-          <p:cNvPr id="4" name="Date Placeholder 3"/>
+              <a:rPr lang="en-US" altLang="zh-TW"/>
+              <a:t>Click to edit Master text styles</a:t>
+            </a:r>
+          </a:p>
+        </p:txBody>
+      </p:sp>
+      <p:sp>
+        <p:nvSpPr>
+          <p:cNvPr id="4" name="日期版面配置區 3"/>
           <p:cNvSpPr>
             <a:spLocks noGrp="1"/>
           </p:cNvSpPr>
@@ -1080,15 +1072,11 @@
         <p:spPr/>
         <p:txBody>
           <a:bodyPr/>
-          <a:lstStyle>
-            <a:lvl1pPr>
-              <a:defRPr/>
-            </a:lvl1pPr>
-          </a:lstStyle>
+          <a:lstStyle/>
           <a:p>
             <a:fld id="{D7BEA608-7224-4CE8-8283-282EDC8021C2}" type="datetimeFigureOut">
               <a:rPr lang="zh-TW" altLang="en-US" smtClean="0"/>
-              <a:t>2014/7/19</a:t>
+              <a:t>2025/4/16</a:t>
             </a:fld>
             <a:endParaRPr lang="zh-TW" altLang="en-US"/>
           </a:p>
@@ -1096,7 +1084,7 @@
       </p:sp>
       <p:sp>
         <p:nvSpPr>
-          <p:cNvPr id="5" name="Footer Placeholder 4"/>
+          <p:cNvPr id="5" name="頁尾版面配置區 4"/>
           <p:cNvSpPr>
             <a:spLocks noGrp="1"/>
           </p:cNvSpPr>
@@ -1107,19 +1095,15 @@
         <p:spPr/>
         <p:txBody>
           <a:bodyPr/>
-          <a:lstStyle>
-            <a:lvl1pPr>
-              <a:defRPr/>
-            </a:lvl1pPr>
-          </a:lstStyle>
-          <a:p>
-            <a:endParaRPr lang="zh-TW" altLang="en-US"/>
-          </a:p>
-        </p:txBody>
-      </p:sp>
-      <p:sp>
-        <p:nvSpPr>
-          <p:cNvPr id="6" name="Slide Number Placeholder 5"/>
+          <a:lstStyle/>
+          <a:p>
+            <a:endParaRPr lang="zh-TW" altLang="en-US"/>
+          </a:p>
+        </p:txBody>
+      </p:sp>
+      <p:sp>
+        <p:nvSpPr>
+          <p:cNvPr id="6" name="投影片編號版面配置區 5"/>
           <p:cNvSpPr>
             <a:spLocks noGrp="1"/>
           </p:cNvSpPr>
@@ -1130,11 +1114,7 @@
         <p:spPr/>
         <p:txBody>
           <a:bodyPr/>
-          <a:lstStyle>
-            <a:lvl1pPr>
-              <a:defRPr/>
-            </a:lvl1pPr>
-          </a:lstStyle>
+          <a:lstStyle/>
           <a:p>
             <a:fld id="{D22BDFD0-99D4-44A5-A06A-7B0304E2794B}" type="slidenum">
               <a:rPr lang="zh-TW" altLang="en-US" smtClean="0"/>
@@ -1145,6 +1125,11 @@
         </p:txBody>
       </p:sp>
     </p:spTree>
+    <p:extLst>
+      <p:ext uri="{BB962C8B-B14F-4D97-AF65-F5344CB8AC3E}">
+        <p14:creationId xmlns:p14="http://schemas.microsoft.com/office/powerpoint/2010/main" val="478380602"/>
+      </p:ext>
+    </p:extLst>
   </p:cSld>
   <p:clrMapOvr>
     <a:masterClrMapping/>
@@ -1171,7 +1156,7 @@
       </p:grpSpPr>
       <p:sp>
         <p:nvSpPr>
-          <p:cNvPr id="2" name="Title 1"/>
+          <p:cNvPr id="2" name="標題 1"/>
           <p:cNvSpPr>
             <a:spLocks noGrp="1"/>
           </p:cNvSpPr>
@@ -1185,16 +1170,16 @@
           <a:lstStyle/>
           <a:p>
             <a:r>
-              <a:rPr lang="zh-TW" altLang="en-US" smtClean="0"/>
-              <a:t>按一下以編輯母片標題樣式</a:t>
-            </a:r>
-            <a:endParaRPr lang="en-US"/>
-          </a:p>
-        </p:txBody>
-      </p:sp>
-      <p:sp>
-        <p:nvSpPr>
-          <p:cNvPr id="3" name="Content Placeholder 2"/>
+              <a:rPr lang="en-US" altLang="zh-TW"/>
+              <a:t>Click to edit Master title style</a:t>
+            </a:r>
+            <a:endParaRPr lang="zh-TW" altLang="en-US"/>
+          </a:p>
+        </p:txBody>
+      </p:sp>
+      <p:sp>
+        <p:nvSpPr>
+          <p:cNvPr id="3" name="內容版面配置區 2"/>
           <p:cNvSpPr>
             <a:spLocks noGrp="1"/>
           </p:cNvSpPr>
@@ -1204,8 +1189,8 @@
         </p:nvSpPr>
         <p:spPr>
           <a:xfrm>
-            <a:off x="457200" y="1600200"/>
-            <a:ext cx="4038600" cy="4525963"/>
+            <a:off x="609600" y="1600203"/>
+            <a:ext cx="5384800" cy="4525963"/>
           </a:xfrm>
         </p:spPr>
         <p:txBody>
@@ -1242,44 +1227,44 @@
           <a:p>
             <a:pPr lvl="0"/>
             <a:r>
-              <a:rPr lang="zh-TW" altLang="en-US" smtClean="0"/>
-              <a:t>按一下以編輯母片文字樣式</a:t>
+              <a:rPr lang="en-US" altLang="zh-TW"/>
+              <a:t>Click to edit Master text styles</a:t>
             </a:r>
           </a:p>
           <a:p>
             <a:pPr lvl="1"/>
             <a:r>
-              <a:rPr lang="zh-TW" altLang="en-US" smtClean="0"/>
-              <a:t>第二層</a:t>
+              <a:rPr lang="en-US" altLang="zh-TW"/>
+              <a:t>Second level</a:t>
             </a:r>
           </a:p>
           <a:p>
             <a:pPr lvl="2"/>
             <a:r>
-              <a:rPr lang="zh-TW" altLang="en-US" smtClean="0"/>
-              <a:t>第三層</a:t>
+              <a:rPr lang="en-US" altLang="zh-TW"/>
+              <a:t>Third level</a:t>
             </a:r>
           </a:p>
           <a:p>
             <a:pPr lvl="3"/>
             <a:r>
-              <a:rPr lang="zh-TW" altLang="en-US" smtClean="0"/>
-              <a:t>第四層</a:t>
+              <a:rPr lang="en-US" altLang="zh-TW"/>
+              <a:t>Fourth level</a:t>
             </a:r>
           </a:p>
           <a:p>
             <a:pPr lvl="4"/>
             <a:r>
-              <a:rPr lang="zh-TW" altLang="en-US" smtClean="0"/>
-              <a:t>第五層</a:t>
-            </a:r>
-            <a:endParaRPr lang="en-US"/>
-          </a:p>
-        </p:txBody>
-      </p:sp>
-      <p:sp>
-        <p:nvSpPr>
-          <p:cNvPr id="4" name="Content Placeholder 3"/>
+              <a:rPr lang="en-US" altLang="zh-TW"/>
+              <a:t>Fifth level</a:t>
+            </a:r>
+            <a:endParaRPr lang="zh-TW" altLang="en-US"/>
+          </a:p>
+        </p:txBody>
+      </p:sp>
+      <p:sp>
+        <p:nvSpPr>
+          <p:cNvPr id="4" name="內容版面配置區 3"/>
           <p:cNvSpPr>
             <a:spLocks noGrp="1"/>
           </p:cNvSpPr>
@@ -1289,8 +1274,8 @@
         </p:nvSpPr>
         <p:spPr>
           <a:xfrm>
-            <a:off x="4648200" y="1600200"/>
-            <a:ext cx="4038600" cy="4525963"/>
+            <a:off x="6197600" y="1600203"/>
+            <a:ext cx="5384800" cy="4525963"/>
           </a:xfrm>
         </p:spPr>
         <p:txBody>
@@ -1327,44 +1312,44 @@
           <a:p>
             <a:pPr lvl="0"/>
             <a:r>
-              <a:rPr lang="zh-TW" altLang="en-US" smtClean="0"/>
-              <a:t>按一下以編輯母片文字樣式</a:t>
+              <a:rPr lang="en-US" altLang="zh-TW"/>
+              <a:t>Click to edit Master text styles</a:t>
             </a:r>
           </a:p>
           <a:p>
             <a:pPr lvl="1"/>
             <a:r>
-              <a:rPr lang="zh-TW" altLang="en-US" smtClean="0"/>
-              <a:t>第二層</a:t>
+              <a:rPr lang="en-US" altLang="zh-TW"/>
+              <a:t>Second level</a:t>
             </a:r>
           </a:p>
           <a:p>
             <a:pPr lvl="2"/>
             <a:r>
-              <a:rPr lang="zh-TW" altLang="en-US" smtClean="0"/>
-              <a:t>第三層</a:t>
+              <a:rPr lang="en-US" altLang="zh-TW"/>
+              <a:t>Third level</a:t>
             </a:r>
           </a:p>
           <a:p>
             <a:pPr lvl="3"/>
             <a:r>
-              <a:rPr lang="zh-TW" altLang="en-US" smtClean="0"/>
-              <a:t>第四層</a:t>
+              <a:rPr lang="en-US" altLang="zh-TW"/>
+              <a:t>Fourth level</a:t>
             </a:r>
           </a:p>
           <a:p>
             <a:pPr lvl="4"/>
             <a:r>
-              <a:rPr lang="zh-TW" altLang="en-US" smtClean="0"/>
-              <a:t>第五層</a:t>
-            </a:r>
-            <a:endParaRPr lang="en-US"/>
-          </a:p>
-        </p:txBody>
-      </p:sp>
-      <p:sp>
-        <p:nvSpPr>
-          <p:cNvPr id="5" name="Date Placeholder 3"/>
+              <a:rPr lang="en-US" altLang="zh-TW"/>
+              <a:t>Fifth level</a:t>
+            </a:r>
+            <a:endParaRPr lang="zh-TW" altLang="en-US"/>
+          </a:p>
+        </p:txBody>
+      </p:sp>
+      <p:sp>
+        <p:nvSpPr>
+          <p:cNvPr id="5" name="日期版面配置區 4"/>
           <p:cNvSpPr>
             <a:spLocks noGrp="1"/>
           </p:cNvSpPr>
@@ -1375,15 +1360,11 @@
         <p:spPr/>
         <p:txBody>
           <a:bodyPr/>
-          <a:lstStyle>
-            <a:lvl1pPr>
-              <a:defRPr/>
-            </a:lvl1pPr>
-          </a:lstStyle>
+          <a:lstStyle/>
           <a:p>
             <a:fld id="{D7BEA608-7224-4CE8-8283-282EDC8021C2}" type="datetimeFigureOut">
               <a:rPr lang="zh-TW" altLang="en-US" smtClean="0"/>
-              <a:t>2014/7/19</a:t>
+              <a:t>2025/4/16</a:t>
             </a:fld>
             <a:endParaRPr lang="zh-TW" altLang="en-US"/>
           </a:p>
@@ -1391,7 +1372,7 @@
       </p:sp>
       <p:sp>
         <p:nvSpPr>
-          <p:cNvPr id="6" name="Footer Placeholder 4"/>
+          <p:cNvPr id="6" name="頁尾版面配置區 5"/>
           <p:cNvSpPr>
             <a:spLocks noGrp="1"/>
           </p:cNvSpPr>
@@ -1402,19 +1383,15 @@
         <p:spPr/>
         <p:txBody>
           <a:bodyPr/>
-          <a:lstStyle>
-            <a:lvl1pPr>
-              <a:defRPr/>
-            </a:lvl1pPr>
-          </a:lstStyle>
-          <a:p>
-            <a:endParaRPr lang="zh-TW" altLang="en-US"/>
-          </a:p>
-        </p:txBody>
-      </p:sp>
-      <p:sp>
-        <p:nvSpPr>
-          <p:cNvPr id="7" name="Slide Number Placeholder 5"/>
+          <a:lstStyle/>
+          <a:p>
+            <a:endParaRPr lang="zh-TW" altLang="en-US"/>
+          </a:p>
+        </p:txBody>
+      </p:sp>
+      <p:sp>
+        <p:nvSpPr>
+          <p:cNvPr id="7" name="投影片編號版面配置區 6"/>
           <p:cNvSpPr>
             <a:spLocks noGrp="1"/>
           </p:cNvSpPr>
@@ -1425,11 +1402,7 @@
         <p:spPr/>
         <p:txBody>
           <a:bodyPr/>
-          <a:lstStyle>
-            <a:lvl1pPr>
-              <a:defRPr/>
-            </a:lvl1pPr>
-          </a:lstStyle>
+          <a:lstStyle/>
           <a:p>
             <a:fld id="{D22BDFD0-99D4-44A5-A06A-7B0304E2794B}" type="slidenum">
               <a:rPr lang="zh-TW" altLang="en-US" smtClean="0"/>
@@ -1440,6 +1413,11 @@
         </p:txBody>
       </p:sp>
     </p:spTree>
+    <p:extLst>
+      <p:ext uri="{BB962C8B-B14F-4D97-AF65-F5344CB8AC3E}">
+        <p14:creationId xmlns:p14="http://schemas.microsoft.com/office/powerpoint/2010/main" val="1699949856"/>
+      </p:ext>
+    </p:extLst>
   </p:cSld>
   <p:clrMapOvr>
     <a:masterClrMapping/>
@@ -1466,7 +1444,7 @@
       </p:grpSpPr>
       <p:sp>
         <p:nvSpPr>
-          <p:cNvPr id="2" name="Title 1"/>
+          <p:cNvPr id="2" name="標題 1"/>
           <p:cNvSpPr>
             <a:spLocks noGrp="1"/>
           </p:cNvSpPr>
@@ -1484,16 +1462,16 @@
           </a:lstStyle>
           <a:p>
             <a:r>
-              <a:rPr lang="zh-TW" altLang="en-US" smtClean="0"/>
-              <a:t>按一下以編輯母片標題樣式</a:t>
-            </a:r>
-            <a:endParaRPr lang="en-US"/>
-          </a:p>
-        </p:txBody>
-      </p:sp>
-      <p:sp>
-        <p:nvSpPr>
-          <p:cNvPr id="3" name="Text Placeholder 2"/>
+              <a:rPr lang="en-US" altLang="zh-TW"/>
+              <a:t>Click to edit Master title style</a:t>
+            </a:r>
+            <a:endParaRPr lang="zh-TW" altLang="en-US"/>
+          </a:p>
+        </p:txBody>
+      </p:sp>
+      <p:sp>
+        <p:nvSpPr>
+          <p:cNvPr id="3" name="文字版面配置區 2"/>
           <p:cNvSpPr>
             <a:spLocks noGrp="1"/>
           </p:cNvSpPr>
@@ -1503,8 +1481,8 @@
         </p:nvSpPr>
         <p:spPr>
           <a:xfrm>
-            <a:off x="457200" y="1535113"/>
-            <a:ext cx="4040188" cy="639762"/>
+            <a:off x="609600" y="1535115"/>
+            <a:ext cx="5386917" cy="639763"/>
           </a:xfrm>
         </p:spPr>
         <p:txBody>
@@ -1514,35 +1492,35 @@
               <a:buNone/>
               <a:defRPr sz="2400" b="1"/>
             </a:lvl1pPr>
-            <a:lvl2pPr marL="457200" indent="0">
+            <a:lvl2pPr marL="457189" indent="0">
               <a:buNone/>
               <a:defRPr sz="2000" b="1"/>
             </a:lvl2pPr>
-            <a:lvl3pPr marL="914400" indent="0">
+            <a:lvl3pPr marL="914378" indent="0">
               <a:buNone/>
               <a:defRPr sz="1800" b="1"/>
             </a:lvl3pPr>
-            <a:lvl4pPr marL="1371600" indent="0">
+            <a:lvl4pPr marL="1371566" indent="0">
               <a:buNone/>
               <a:defRPr sz="1600" b="1"/>
             </a:lvl4pPr>
-            <a:lvl5pPr marL="1828800" indent="0">
+            <a:lvl5pPr marL="1828754" indent="0">
               <a:buNone/>
               <a:defRPr sz="1600" b="1"/>
             </a:lvl5pPr>
-            <a:lvl6pPr marL="2286000" indent="0">
+            <a:lvl6pPr marL="2285943" indent="0">
               <a:buNone/>
               <a:defRPr sz="1600" b="1"/>
             </a:lvl6pPr>
-            <a:lvl7pPr marL="2743200" indent="0">
+            <a:lvl7pPr marL="2743132" indent="0">
               <a:buNone/>
               <a:defRPr sz="1600" b="1"/>
             </a:lvl7pPr>
-            <a:lvl8pPr marL="3200400" indent="0">
+            <a:lvl8pPr marL="3200320" indent="0">
               <a:buNone/>
               <a:defRPr sz="1600" b="1"/>
             </a:lvl8pPr>
-            <a:lvl9pPr marL="3657600" indent="0">
+            <a:lvl9pPr marL="3657509" indent="0">
               <a:buNone/>
               <a:defRPr sz="1600" b="1"/>
             </a:lvl9pPr>
@@ -1550,15 +1528,15 @@
           <a:p>
             <a:pPr lvl="0"/>
             <a:r>
-              <a:rPr lang="zh-TW" altLang="en-US" smtClean="0"/>
-              <a:t>按一下以編輯母片文字樣式</a:t>
-            </a:r>
-          </a:p>
-        </p:txBody>
-      </p:sp>
-      <p:sp>
-        <p:nvSpPr>
-          <p:cNvPr id="4" name="Content Placeholder 3"/>
+              <a:rPr lang="en-US" altLang="zh-TW"/>
+              <a:t>Click to edit Master text styles</a:t>
+            </a:r>
+          </a:p>
+        </p:txBody>
+      </p:sp>
+      <p:sp>
+        <p:nvSpPr>
+          <p:cNvPr id="4" name="內容版面配置區 3"/>
           <p:cNvSpPr>
             <a:spLocks noGrp="1"/>
           </p:cNvSpPr>
@@ -1568,8 +1546,8 @@
         </p:nvSpPr>
         <p:spPr>
           <a:xfrm>
-            <a:off x="457200" y="2174875"/>
-            <a:ext cx="4040188" cy="3951288"/>
+            <a:off x="609600" y="2174875"/>
+            <a:ext cx="5386917" cy="3951288"/>
           </a:xfrm>
         </p:spPr>
         <p:txBody>
@@ -1606,44 +1584,44 @@
           <a:p>
             <a:pPr lvl="0"/>
             <a:r>
-              <a:rPr lang="zh-TW" altLang="en-US" smtClean="0"/>
-              <a:t>按一下以編輯母片文字樣式</a:t>
+              <a:rPr lang="en-US" altLang="zh-TW"/>
+              <a:t>Click to edit Master text styles</a:t>
             </a:r>
           </a:p>
           <a:p>
             <a:pPr lvl="1"/>
             <a:r>
-              <a:rPr lang="zh-TW" altLang="en-US" smtClean="0"/>
-              <a:t>第二層</a:t>
+              <a:rPr lang="en-US" altLang="zh-TW"/>
+              <a:t>Second level</a:t>
             </a:r>
           </a:p>
           <a:p>
             <a:pPr lvl="2"/>
             <a:r>
-              <a:rPr lang="zh-TW" altLang="en-US" smtClean="0"/>
-              <a:t>第三層</a:t>
+              <a:rPr lang="en-US" altLang="zh-TW"/>
+              <a:t>Third level</a:t>
             </a:r>
           </a:p>
           <a:p>
             <a:pPr lvl="3"/>
             <a:r>
-              <a:rPr lang="zh-TW" altLang="en-US" smtClean="0"/>
-              <a:t>第四層</a:t>
+              <a:rPr lang="en-US" altLang="zh-TW"/>
+              <a:t>Fourth level</a:t>
             </a:r>
           </a:p>
           <a:p>
             <a:pPr lvl="4"/>
             <a:r>
-              <a:rPr lang="zh-TW" altLang="en-US" smtClean="0"/>
-              <a:t>第五層</a:t>
-            </a:r>
-            <a:endParaRPr lang="en-US"/>
-          </a:p>
-        </p:txBody>
-      </p:sp>
-      <p:sp>
-        <p:nvSpPr>
-          <p:cNvPr id="5" name="Text Placeholder 4"/>
+              <a:rPr lang="en-US" altLang="zh-TW"/>
+              <a:t>Fifth level</a:t>
+            </a:r>
+            <a:endParaRPr lang="zh-TW" altLang="en-US"/>
+          </a:p>
+        </p:txBody>
+      </p:sp>
+      <p:sp>
+        <p:nvSpPr>
+          <p:cNvPr id="5" name="文字版面配置區 4"/>
           <p:cNvSpPr>
             <a:spLocks noGrp="1"/>
           </p:cNvSpPr>
@@ -1653,8 +1631,8 @@
         </p:nvSpPr>
         <p:spPr>
           <a:xfrm>
-            <a:off x="4645025" y="1535113"/>
-            <a:ext cx="4041775" cy="639762"/>
+            <a:off x="6193373" y="1535115"/>
+            <a:ext cx="5389033" cy="639763"/>
           </a:xfrm>
         </p:spPr>
         <p:txBody>
@@ -1664,35 +1642,35 @@
               <a:buNone/>
               <a:defRPr sz="2400" b="1"/>
             </a:lvl1pPr>
-            <a:lvl2pPr marL="457200" indent="0">
+            <a:lvl2pPr marL="457189" indent="0">
               <a:buNone/>
               <a:defRPr sz="2000" b="1"/>
             </a:lvl2pPr>
-            <a:lvl3pPr marL="914400" indent="0">
+            <a:lvl3pPr marL="914378" indent="0">
               <a:buNone/>
               <a:defRPr sz="1800" b="1"/>
             </a:lvl3pPr>
-            <a:lvl4pPr marL="1371600" indent="0">
+            <a:lvl4pPr marL="1371566" indent="0">
               <a:buNone/>
               <a:defRPr sz="1600" b="1"/>
             </a:lvl4pPr>
-            <a:lvl5pPr marL="1828800" indent="0">
+            <a:lvl5pPr marL="1828754" indent="0">
               <a:buNone/>
               <a:defRPr sz="1600" b="1"/>
             </a:lvl5pPr>
-            <a:lvl6pPr marL="2286000" indent="0">
+            <a:lvl6pPr marL="2285943" indent="0">
               <a:buNone/>
               <a:defRPr sz="1600" b="1"/>
             </a:lvl6pPr>
-            <a:lvl7pPr marL="2743200" indent="0">
+            <a:lvl7pPr marL="2743132" indent="0">
               <a:buNone/>
               <a:defRPr sz="1600" b="1"/>
             </a:lvl7pPr>
-            <a:lvl8pPr marL="3200400" indent="0">
+            <a:lvl8pPr marL="3200320" indent="0">
               <a:buNone/>
               <a:defRPr sz="1600" b="1"/>
             </a:lvl8pPr>
-            <a:lvl9pPr marL="3657600" indent="0">
+            <a:lvl9pPr marL="3657509" indent="0">
               <a:buNone/>
               <a:defRPr sz="1600" b="1"/>
             </a:lvl9pPr>
@@ -1700,15 +1678,15 @@
           <a:p>
             <a:pPr lvl="0"/>
             <a:r>
-              <a:rPr lang="zh-TW" altLang="en-US" smtClean="0"/>
-              <a:t>按一下以編輯母片文字樣式</a:t>
-            </a:r>
-          </a:p>
-        </p:txBody>
-      </p:sp>
-      <p:sp>
-        <p:nvSpPr>
-          <p:cNvPr id="6" name="Content Placeholder 5"/>
+              <a:rPr lang="en-US" altLang="zh-TW"/>
+              <a:t>Click to edit Master text styles</a:t>
+            </a:r>
+          </a:p>
+        </p:txBody>
+      </p:sp>
+      <p:sp>
+        <p:nvSpPr>
+          <p:cNvPr id="6" name="內容版面配置區 5"/>
           <p:cNvSpPr>
             <a:spLocks noGrp="1"/>
           </p:cNvSpPr>
@@ -1718,8 +1696,8 @@
         </p:nvSpPr>
         <p:spPr>
           <a:xfrm>
-            <a:off x="4645025" y="2174875"/>
-            <a:ext cx="4041775" cy="3951288"/>
+            <a:off x="6193373" y="2174875"/>
+            <a:ext cx="5389033" cy="3951288"/>
           </a:xfrm>
         </p:spPr>
         <p:txBody>
@@ -1756,44 +1734,44 @@
           <a:p>
             <a:pPr lvl="0"/>
             <a:r>
-              <a:rPr lang="zh-TW" altLang="en-US" smtClean="0"/>
-              <a:t>按一下以編輯母片文字樣式</a:t>
+              <a:rPr lang="en-US" altLang="zh-TW"/>
+              <a:t>Click to edit Master text styles</a:t>
             </a:r>
           </a:p>
           <a:p>
             <a:pPr lvl="1"/>
             <a:r>
-              <a:rPr lang="zh-TW" altLang="en-US" smtClean="0"/>
-              <a:t>第二層</a:t>
+              <a:rPr lang="en-US" altLang="zh-TW"/>
+              <a:t>Second level</a:t>
             </a:r>
           </a:p>
           <a:p>
             <a:pPr lvl="2"/>
             <a:r>
-              <a:rPr lang="zh-TW" altLang="en-US" smtClean="0"/>
-              <a:t>第三層</a:t>
+              <a:rPr lang="en-US" altLang="zh-TW"/>
+              <a:t>Third level</a:t>
             </a:r>
           </a:p>
           <a:p>
             <a:pPr lvl="3"/>
             <a:r>
-              <a:rPr lang="zh-TW" altLang="en-US" smtClean="0"/>
-              <a:t>第四層</a:t>
+              <a:rPr lang="en-US" altLang="zh-TW"/>
+              <a:t>Fourth level</a:t>
             </a:r>
           </a:p>
           <a:p>
             <a:pPr lvl="4"/>
             <a:r>
-              <a:rPr lang="zh-TW" altLang="en-US" smtClean="0"/>
-              <a:t>第五層</a:t>
-            </a:r>
-            <a:endParaRPr lang="en-US"/>
-          </a:p>
-        </p:txBody>
-      </p:sp>
-      <p:sp>
-        <p:nvSpPr>
-          <p:cNvPr id="7" name="Date Placeholder 3"/>
+              <a:rPr lang="en-US" altLang="zh-TW"/>
+              <a:t>Fifth level</a:t>
+            </a:r>
+            <a:endParaRPr lang="zh-TW" altLang="en-US"/>
+          </a:p>
+        </p:txBody>
+      </p:sp>
+      <p:sp>
+        <p:nvSpPr>
+          <p:cNvPr id="7" name="日期版面配置區 6"/>
           <p:cNvSpPr>
             <a:spLocks noGrp="1"/>
           </p:cNvSpPr>
@@ -1804,15 +1782,11 @@
         <p:spPr/>
         <p:txBody>
           <a:bodyPr/>
-          <a:lstStyle>
-            <a:lvl1pPr>
-              <a:defRPr/>
-            </a:lvl1pPr>
-          </a:lstStyle>
+          <a:lstStyle/>
           <a:p>
             <a:fld id="{D7BEA608-7224-4CE8-8283-282EDC8021C2}" type="datetimeFigureOut">
               <a:rPr lang="zh-TW" altLang="en-US" smtClean="0"/>
-              <a:t>2014/7/19</a:t>
+              <a:t>2025/4/16</a:t>
             </a:fld>
             <a:endParaRPr lang="zh-TW" altLang="en-US"/>
           </a:p>
@@ -1820,7 +1794,7 @@
       </p:sp>
       <p:sp>
         <p:nvSpPr>
-          <p:cNvPr id="8" name="Footer Placeholder 4"/>
+          <p:cNvPr id="8" name="頁尾版面配置區 7"/>
           <p:cNvSpPr>
             <a:spLocks noGrp="1"/>
           </p:cNvSpPr>
@@ -1831,19 +1805,15 @@
         <p:spPr/>
         <p:txBody>
           <a:bodyPr/>
-          <a:lstStyle>
-            <a:lvl1pPr>
-              <a:defRPr/>
-            </a:lvl1pPr>
-          </a:lstStyle>
-          <a:p>
-            <a:endParaRPr lang="zh-TW" altLang="en-US"/>
-          </a:p>
-        </p:txBody>
-      </p:sp>
-      <p:sp>
-        <p:nvSpPr>
-          <p:cNvPr id="9" name="Slide Number Placeholder 5"/>
+          <a:lstStyle/>
+          <a:p>
+            <a:endParaRPr lang="zh-TW" altLang="en-US"/>
+          </a:p>
+        </p:txBody>
+      </p:sp>
+      <p:sp>
+        <p:nvSpPr>
+          <p:cNvPr id="9" name="投影片編號版面配置區 8"/>
           <p:cNvSpPr>
             <a:spLocks noGrp="1"/>
           </p:cNvSpPr>
@@ -1854,11 +1824,7 @@
         <p:spPr/>
         <p:txBody>
           <a:bodyPr/>
-          <a:lstStyle>
-            <a:lvl1pPr>
-              <a:defRPr/>
-            </a:lvl1pPr>
-          </a:lstStyle>
+          <a:lstStyle/>
           <a:p>
             <a:fld id="{D22BDFD0-99D4-44A5-A06A-7B0304E2794B}" type="slidenum">
               <a:rPr lang="zh-TW" altLang="en-US" smtClean="0"/>
@@ -1869,6 +1835,11 @@
         </p:txBody>
       </p:sp>
     </p:spTree>
+    <p:extLst>
+      <p:ext uri="{BB962C8B-B14F-4D97-AF65-F5344CB8AC3E}">
+        <p14:creationId xmlns:p14="http://schemas.microsoft.com/office/powerpoint/2010/main" val="3659368521"/>
+      </p:ext>
+    </p:extLst>
   </p:cSld>
   <p:clrMapOvr>
     <a:masterClrMapping/>
@@ -1895,7 +1866,7 @@
       </p:grpSpPr>
       <p:sp>
         <p:nvSpPr>
-          <p:cNvPr id="2" name="Title 1"/>
+          <p:cNvPr id="2" name="標題 1"/>
           <p:cNvSpPr>
             <a:spLocks noGrp="1"/>
           </p:cNvSpPr>
@@ -1909,16 +1880,16 @@
           <a:lstStyle/>
           <a:p>
             <a:r>
-              <a:rPr lang="zh-TW" altLang="en-US" smtClean="0"/>
-              <a:t>按一下以編輯母片標題樣式</a:t>
-            </a:r>
-            <a:endParaRPr lang="en-US"/>
-          </a:p>
-        </p:txBody>
-      </p:sp>
-      <p:sp>
-        <p:nvSpPr>
-          <p:cNvPr id="3" name="Date Placeholder 3"/>
+              <a:rPr lang="en-US" altLang="zh-TW"/>
+              <a:t>Click to edit Master title style</a:t>
+            </a:r>
+            <a:endParaRPr lang="zh-TW" altLang="en-US"/>
+          </a:p>
+        </p:txBody>
+      </p:sp>
+      <p:sp>
+        <p:nvSpPr>
+          <p:cNvPr id="3" name="日期版面配置區 2"/>
           <p:cNvSpPr>
             <a:spLocks noGrp="1"/>
           </p:cNvSpPr>
@@ -1929,15 +1900,11 @@
         <p:spPr/>
         <p:txBody>
           <a:bodyPr/>
-          <a:lstStyle>
-            <a:lvl1pPr>
-              <a:defRPr/>
-            </a:lvl1pPr>
-          </a:lstStyle>
+          <a:lstStyle/>
           <a:p>
             <a:fld id="{D7BEA608-7224-4CE8-8283-282EDC8021C2}" type="datetimeFigureOut">
               <a:rPr lang="zh-TW" altLang="en-US" smtClean="0"/>
-              <a:t>2014/7/19</a:t>
+              <a:t>2025/4/16</a:t>
             </a:fld>
             <a:endParaRPr lang="zh-TW" altLang="en-US"/>
           </a:p>
@@ -1945,7 +1912,7 @@
       </p:sp>
       <p:sp>
         <p:nvSpPr>
-          <p:cNvPr id="4" name="Footer Placeholder 4"/>
+          <p:cNvPr id="4" name="頁尾版面配置區 3"/>
           <p:cNvSpPr>
             <a:spLocks noGrp="1"/>
           </p:cNvSpPr>
@@ -1956,19 +1923,15 @@
         <p:spPr/>
         <p:txBody>
           <a:bodyPr/>
-          <a:lstStyle>
-            <a:lvl1pPr>
-              <a:defRPr/>
-            </a:lvl1pPr>
-          </a:lstStyle>
-          <a:p>
-            <a:endParaRPr lang="zh-TW" altLang="en-US"/>
-          </a:p>
-        </p:txBody>
-      </p:sp>
-      <p:sp>
-        <p:nvSpPr>
-          <p:cNvPr id="5" name="Slide Number Placeholder 5"/>
+          <a:lstStyle/>
+          <a:p>
+            <a:endParaRPr lang="zh-TW" altLang="en-US"/>
+          </a:p>
+        </p:txBody>
+      </p:sp>
+      <p:sp>
+        <p:nvSpPr>
+          <p:cNvPr id="5" name="投影片編號版面配置區 4"/>
           <p:cNvSpPr>
             <a:spLocks noGrp="1"/>
           </p:cNvSpPr>
@@ -1979,11 +1942,7 @@
         <p:spPr/>
         <p:txBody>
           <a:bodyPr/>
-          <a:lstStyle>
-            <a:lvl1pPr>
-              <a:defRPr/>
-            </a:lvl1pPr>
-          </a:lstStyle>
+          <a:lstStyle/>
           <a:p>
             <a:fld id="{D22BDFD0-99D4-44A5-A06A-7B0304E2794B}" type="slidenum">
               <a:rPr lang="zh-TW" altLang="en-US" smtClean="0"/>
@@ -1994,6 +1953,11 @@
         </p:txBody>
       </p:sp>
     </p:spTree>
+    <p:extLst>
+      <p:ext uri="{BB962C8B-B14F-4D97-AF65-F5344CB8AC3E}">
+        <p14:creationId xmlns:p14="http://schemas.microsoft.com/office/powerpoint/2010/main" val="1193590394"/>
+      </p:ext>
+    </p:extLst>
   </p:cSld>
   <p:clrMapOvr>
     <a:masterClrMapping/>
@@ -2020,7 +1984,7 @@
       </p:grpSpPr>
       <p:sp>
         <p:nvSpPr>
-          <p:cNvPr id="2" name="Date Placeholder 3"/>
+          <p:cNvPr id="2" name="日期版面配置區 1"/>
           <p:cNvSpPr>
             <a:spLocks noGrp="1"/>
           </p:cNvSpPr>
@@ -2031,15 +1995,11 @@
         <p:spPr/>
         <p:txBody>
           <a:bodyPr/>
-          <a:lstStyle>
-            <a:lvl1pPr>
-              <a:defRPr/>
-            </a:lvl1pPr>
-          </a:lstStyle>
+          <a:lstStyle/>
           <a:p>
             <a:fld id="{D7BEA608-7224-4CE8-8283-282EDC8021C2}" type="datetimeFigureOut">
               <a:rPr lang="zh-TW" altLang="en-US" smtClean="0"/>
-              <a:t>2014/7/19</a:t>
+              <a:t>2025/4/16</a:t>
             </a:fld>
             <a:endParaRPr lang="zh-TW" altLang="en-US"/>
           </a:p>
@@ -2047,7 +2007,7 @@
       </p:sp>
       <p:sp>
         <p:nvSpPr>
-          <p:cNvPr id="3" name="Footer Placeholder 4"/>
+          <p:cNvPr id="3" name="頁尾版面配置區 2"/>
           <p:cNvSpPr>
             <a:spLocks noGrp="1"/>
           </p:cNvSpPr>
@@ -2058,19 +2018,15 @@
         <p:spPr/>
         <p:txBody>
           <a:bodyPr/>
-          <a:lstStyle>
-            <a:lvl1pPr>
-              <a:defRPr/>
-            </a:lvl1pPr>
-          </a:lstStyle>
-          <a:p>
-            <a:endParaRPr lang="zh-TW" altLang="en-US"/>
-          </a:p>
-        </p:txBody>
-      </p:sp>
-      <p:sp>
-        <p:nvSpPr>
-          <p:cNvPr id="4" name="Slide Number Placeholder 5"/>
+          <a:lstStyle/>
+          <a:p>
+            <a:endParaRPr lang="zh-TW" altLang="en-US"/>
+          </a:p>
+        </p:txBody>
+      </p:sp>
+      <p:sp>
+        <p:nvSpPr>
+          <p:cNvPr id="4" name="投影片編號版面配置區 3"/>
           <p:cNvSpPr>
             <a:spLocks noGrp="1"/>
           </p:cNvSpPr>
@@ -2081,11 +2037,7 @@
         <p:spPr/>
         <p:txBody>
           <a:bodyPr/>
-          <a:lstStyle>
-            <a:lvl1pPr>
-              <a:defRPr/>
-            </a:lvl1pPr>
-          </a:lstStyle>
+          <a:lstStyle/>
           <a:p>
             <a:fld id="{D22BDFD0-99D4-44A5-A06A-7B0304E2794B}" type="slidenum">
               <a:rPr lang="zh-TW" altLang="en-US" smtClean="0"/>
@@ -2096,6 +2048,11 @@
         </p:txBody>
       </p:sp>
     </p:spTree>
+    <p:extLst>
+      <p:ext uri="{BB962C8B-B14F-4D97-AF65-F5344CB8AC3E}">
+        <p14:creationId xmlns:p14="http://schemas.microsoft.com/office/powerpoint/2010/main" val="2614277165"/>
+      </p:ext>
+    </p:extLst>
   </p:cSld>
   <p:clrMapOvr>
     <a:masterClrMapping/>
@@ -2122,7 +2079,7 @@
       </p:grpSpPr>
       <p:sp>
         <p:nvSpPr>
-          <p:cNvPr id="2" name="Title 1"/>
+          <p:cNvPr id="2" name="標題 1"/>
           <p:cNvSpPr>
             <a:spLocks noGrp="1"/>
           </p:cNvSpPr>
@@ -2132,8 +2089,8 @@
         </p:nvSpPr>
         <p:spPr>
           <a:xfrm>
-            <a:off x="457200" y="273050"/>
-            <a:ext cx="3008313" cy="1162050"/>
+            <a:off x="609603" y="273051"/>
+            <a:ext cx="4011084" cy="1162051"/>
           </a:xfrm>
         </p:spPr>
         <p:txBody>
@@ -2145,16 +2102,16 @@
           </a:lstStyle>
           <a:p>
             <a:r>
-              <a:rPr lang="zh-TW" altLang="en-US" smtClean="0"/>
-              <a:t>按一下以編輯母片標題樣式</a:t>
-            </a:r>
-            <a:endParaRPr lang="en-US"/>
-          </a:p>
-        </p:txBody>
-      </p:sp>
-      <p:sp>
-        <p:nvSpPr>
-          <p:cNvPr id="3" name="Content Placeholder 2"/>
+              <a:rPr lang="en-US" altLang="zh-TW"/>
+              <a:t>Click to edit Master title style</a:t>
+            </a:r>
+            <a:endParaRPr lang="zh-TW" altLang="en-US"/>
+          </a:p>
+        </p:txBody>
+      </p:sp>
+      <p:sp>
+        <p:nvSpPr>
+          <p:cNvPr id="3" name="內容版面配置區 2"/>
           <p:cNvSpPr>
             <a:spLocks noGrp="1"/>
           </p:cNvSpPr>
@@ -2164,8 +2121,8 @@
         </p:nvSpPr>
         <p:spPr>
           <a:xfrm>
-            <a:off x="3575050" y="273050"/>
-            <a:ext cx="5111750" cy="5853113"/>
+            <a:off x="4766733" y="273055"/>
+            <a:ext cx="6815667" cy="5853113"/>
           </a:xfrm>
         </p:spPr>
         <p:txBody>
@@ -2202,44 +2159,44 @@
           <a:p>
             <a:pPr lvl="0"/>
             <a:r>
-              <a:rPr lang="zh-TW" altLang="en-US" smtClean="0"/>
-              <a:t>按一下以編輯母片文字樣式</a:t>
+              <a:rPr lang="en-US" altLang="zh-TW"/>
+              <a:t>Click to edit Master text styles</a:t>
             </a:r>
           </a:p>
           <a:p>
             <a:pPr lvl="1"/>
             <a:r>
-              <a:rPr lang="zh-TW" altLang="en-US" smtClean="0"/>
-              <a:t>第二層</a:t>
+              <a:rPr lang="en-US" altLang="zh-TW"/>
+              <a:t>Second level</a:t>
             </a:r>
           </a:p>
           <a:p>
             <a:pPr lvl="2"/>
             <a:r>
-              <a:rPr lang="zh-TW" altLang="en-US" smtClean="0"/>
-              <a:t>第三層</a:t>
+              <a:rPr lang="en-US" altLang="zh-TW"/>
+              <a:t>Third level</a:t>
             </a:r>
           </a:p>
           <a:p>
             <a:pPr lvl="3"/>
             <a:r>
-              <a:rPr lang="zh-TW" altLang="en-US" smtClean="0"/>
-              <a:t>第四層</a:t>
+              <a:rPr lang="en-US" altLang="zh-TW"/>
+              <a:t>Fourth level</a:t>
             </a:r>
           </a:p>
           <a:p>
             <a:pPr lvl="4"/>
             <a:r>
-              <a:rPr lang="zh-TW" altLang="en-US" smtClean="0"/>
-              <a:t>第五層</a:t>
-            </a:r>
-            <a:endParaRPr lang="en-US"/>
-          </a:p>
-        </p:txBody>
-      </p:sp>
-      <p:sp>
-        <p:nvSpPr>
-          <p:cNvPr id="4" name="Text Placeholder 3"/>
+              <a:rPr lang="en-US" altLang="zh-TW"/>
+              <a:t>Fifth level</a:t>
+            </a:r>
+            <a:endParaRPr lang="zh-TW" altLang="en-US"/>
+          </a:p>
+        </p:txBody>
+      </p:sp>
+      <p:sp>
+        <p:nvSpPr>
+          <p:cNvPr id="4" name="文字版面配置區 3"/>
           <p:cNvSpPr>
             <a:spLocks noGrp="1"/>
           </p:cNvSpPr>
@@ -2249,8 +2206,8 @@
         </p:nvSpPr>
         <p:spPr>
           <a:xfrm>
-            <a:off x="457200" y="1435100"/>
-            <a:ext cx="3008313" cy="4691063"/>
+            <a:off x="609603" y="1435103"/>
+            <a:ext cx="4011084" cy="4691063"/>
           </a:xfrm>
         </p:spPr>
         <p:txBody>
@@ -2260,35 +2217,35 @@
               <a:buNone/>
               <a:defRPr sz="1400"/>
             </a:lvl1pPr>
-            <a:lvl2pPr marL="457200" indent="0">
+            <a:lvl2pPr marL="457189" indent="0">
               <a:buNone/>
               <a:defRPr sz="1200"/>
             </a:lvl2pPr>
-            <a:lvl3pPr marL="914400" indent="0">
+            <a:lvl3pPr marL="914378" indent="0">
               <a:buNone/>
               <a:defRPr sz="1000"/>
             </a:lvl3pPr>
-            <a:lvl4pPr marL="1371600" indent="0">
+            <a:lvl4pPr marL="1371566" indent="0">
               <a:buNone/>
               <a:defRPr sz="900"/>
             </a:lvl4pPr>
-            <a:lvl5pPr marL="1828800" indent="0">
+            <a:lvl5pPr marL="1828754" indent="0">
               <a:buNone/>
               <a:defRPr sz="900"/>
             </a:lvl5pPr>
-            <a:lvl6pPr marL="2286000" indent="0">
+            <a:lvl6pPr marL="2285943" indent="0">
               <a:buNone/>
               <a:defRPr sz="900"/>
             </a:lvl6pPr>
-            <a:lvl7pPr marL="2743200" indent="0">
+            <a:lvl7pPr marL="2743132" indent="0">
               <a:buNone/>
               <a:defRPr sz="900"/>
             </a:lvl7pPr>
-            <a:lvl8pPr marL="3200400" indent="0">
+            <a:lvl8pPr marL="3200320" indent="0">
               <a:buNone/>
               <a:defRPr sz="900"/>
             </a:lvl8pPr>
-            <a:lvl9pPr marL="3657600" indent="0">
+            <a:lvl9pPr marL="3657509" indent="0">
               <a:buNone/>
               <a:defRPr sz="900"/>
             </a:lvl9pPr>
@@ -2296,15 +2253,15 @@
           <a:p>
             <a:pPr lvl="0"/>
             <a:r>
-              <a:rPr lang="zh-TW" altLang="en-US" smtClean="0"/>
-              <a:t>按一下以編輯母片文字樣式</a:t>
-            </a:r>
-          </a:p>
-        </p:txBody>
-      </p:sp>
-      <p:sp>
-        <p:nvSpPr>
-          <p:cNvPr id="5" name="Date Placeholder 3"/>
+              <a:rPr lang="en-US" altLang="zh-TW"/>
+              <a:t>Click to edit Master text styles</a:t>
+            </a:r>
+          </a:p>
+        </p:txBody>
+      </p:sp>
+      <p:sp>
+        <p:nvSpPr>
+          <p:cNvPr id="5" name="日期版面配置區 4"/>
           <p:cNvSpPr>
             <a:spLocks noGrp="1"/>
           </p:cNvSpPr>
@@ -2315,15 +2272,11 @@
         <p:spPr/>
         <p:txBody>
           <a:bodyPr/>
-          <a:lstStyle>
-            <a:lvl1pPr>
-              <a:defRPr/>
-            </a:lvl1pPr>
-          </a:lstStyle>
+          <a:lstStyle/>
           <a:p>
             <a:fld id="{D7BEA608-7224-4CE8-8283-282EDC8021C2}" type="datetimeFigureOut">
               <a:rPr lang="zh-TW" altLang="en-US" smtClean="0"/>
-              <a:t>2014/7/19</a:t>
+              <a:t>2025/4/16</a:t>
             </a:fld>
             <a:endParaRPr lang="zh-TW" altLang="en-US"/>
           </a:p>
@@ -2331,7 +2284,7 @@
       </p:sp>
       <p:sp>
         <p:nvSpPr>
-          <p:cNvPr id="6" name="Footer Placeholder 4"/>
+          <p:cNvPr id="6" name="頁尾版面配置區 5"/>
           <p:cNvSpPr>
             <a:spLocks noGrp="1"/>
           </p:cNvSpPr>
@@ -2342,19 +2295,15 @@
         <p:spPr/>
         <p:txBody>
           <a:bodyPr/>
-          <a:lstStyle>
-            <a:lvl1pPr>
-              <a:defRPr/>
-            </a:lvl1pPr>
-          </a:lstStyle>
-          <a:p>
-            <a:endParaRPr lang="zh-TW" altLang="en-US"/>
-          </a:p>
-        </p:txBody>
-      </p:sp>
-      <p:sp>
-        <p:nvSpPr>
-          <p:cNvPr id="7" name="Slide Number Placeholder 5"/>
+          <a:lstStyle/>
+          <a:p>
+            <a:endParaRPr lang="zh-TW" altLang="en-US"/>
+          </a:p>
+        </p:txBody>
+      </p:sp>
+      <p:sp>
+        <p:nvSpPr>
+          <p:cNvPr id="7" name="投影片編號版面配置區 6"/>
           <p:cNvSpPr>
             <a:spLocks noGrp="1"/>
           </p:cNvSpPr>
@@ -2365,11 +2314,7 @@
         <p:spPr/>
         <p:txBody>
           <a:bodyPr/>
-          <a:lstStyle>
-            <a:lvl1pPr>
-              <a:defRPr/>
-            </a:lvl1pPr>
-          </a:lstStyle>
+          <a:lstStyle/>
           <a:p>
             <a:fld id="{D22BDFD0-99D4-44A5-A06A-7B0304E2794B}" type="slidenum">
               <a:rPr lang="zh-TW" altLang="en-US" smtClean="0"/>
@@ -2380,6 +2325,11 @@
         </p:txBody>
       </p:sp>
     </p:spTree>
+    <p:extLst>
+      <p:ext uri="{BB962C8B-B14F-4D97-AF65-F5344CB8AC3E}">
+        <p14:creationId xmlns:p14="http://schemas.microsoft.com/office/powerpoint/2010/main" val="1534194210"/>
+      </p:ext>
+    </p:extLst>
   </p:cSld>
   <p:clrMapOvr>
     <a:masterClrMapping/>
@@ -2406,7 +2356,7 @@
       </p:grpSpPr>
       <p:sp>
         <p:nvSpPr>
-          <p:cNvPr id="2" name="Title 1"/>
+          <p:cNvPr id="2" name="標題 1"/>
           <p:cNvSpPr>
             <a:spLocks noGrp="1"/>
           </p:cNvSpPr>
@@ -2416,8 +2366,8 @@
         </p:nvSpPr>
         <p:spPr>
           <a:xfrm>
-            <a:off x="1792288" y="4800600"/>
-            <a:ext cx="5486400" cy="566738"/>
+            <a:off x="2389717" y="4800603"/>
+            <a:ext cx="7315200" cy="566739"/>
           </a:xfrm>
         </p:spPr>
         <p:txBody>
@@ -2429,16 +2379,16 @@
           </a:lstStyle>
           <a:p>
             <a:r>
-              <a:rPr lang="zh-TW" altLang="en-US" smtClean="0"/>
-              <a:t>按一下以編輯母片標題樣式</a:t>
-            </a:r>
-            <a:endParaRPr lang="en-US"/>
-          </a:p>
-        </p:txBody>
-      </p:sp>
-      <p:sp>
-        <p:nvSpPr>
-          <p:cNvPr id="3" name="Picture Placeholder 2"/>
+              <a:rPr lang="en-US" altLang="zh-TW"/>
+              <a:t>Click to edit Master title style</a:t>
+            </a:r>
+            <a:endParaRPr lang="zh-TW" altLang="en-US"/>
+          </a:p>
+        </p:txBody>
+      </p:sp>
+      <p:sp>
+        <p:nvSpPr>
+          <p:cNvPr id="3" name="圖片版面配置區 2"/>
           <p:cNvSpPr>
             <a:spLocks noGrp="1"/>
           </p:cNvSpPr>
@@ -2448,65 +2398,62 @@
         </p:nvSpPr>
         <p:spPr>
           <a:xfrm>
-            <a:off x="1792288" y="612775"/>
-            <a:ext cx="5486400" cy="4114800"/>
+            <a:off x="2389717" y="612775"/>
+            <a:ext cx="7315200" cy="4114800"/>
           </a:xfrm>
         </p:spPr>
         <p:txBody>
-          <a:bodyPr rtlCol="0">
-            <a:normAutofit/>
-          </a:bodyPr>
+          <a:bodyPr/>
           <a:lstStyle>
             <a:lvl1pPr marL="0" indent="0">
               <a:buNone/>
               <a:defRPr sz="3200"/>
             </a:lvl1pPr>
-            <a:lvl2pPr marL="457200" indent="0">
+            <a:lvl2pPr marL="457189" indent="0">
               <a:buNone/>
               <a:defRPr sz="2800"/>
             </a:lvl2pPr>
-            <a:lvl3pPr marL="914400" indent="0">
+            <a:lvl3pPr marL="914378" indent="0">
               <a:buNone/>
               <a:defRPr sz="2400"/>
             </a:lvl3pPr>
-            <a:lvl4pPr marL="1371600" indent="0">
+            <a:lvl4pPr marL="1371566" indent="0">
               <a:buNone/>
               <a:defRPr sz="2000"/>
             </a:lvl4pPr>
-            <a:lvl5pPr marL="1828800" indent="0">
+            <a:lvl5pPr marL="1828754" indent="0">
               <a:buNone/>
               <a:defRPr sz="2000"/>
             </a:lvl5pPr>
-            <a:lvl6pPr marL="2286000" indent="0">
+            <a:lvl6pPr marL="2285943" indent="0">
               <a:buNone/>
               <a:defRPr sz="2000"/>
             </a:lvl6pPr>
-            <a:lvl7pPr marL="2743200" indent="0">
+            <a:lvl7pPr marL="2743132" indent="0">
               <a:buNone/>
               <a:defRPr sz="2000"/>
             </a:lvl7pPr>
-            <a:lvl8pPr marL="3200400" indent="0">
+            <a:lvl8pPr marL="3200320" indent="0">
               <a:buNone/>
               <a:defRPr sz="2000"/>
             </a:lvl8pPr>
-            <a:lvl9pPr marL="3657600" indent="0">
+            <a:lvl9pPr marL="3657509" indent="0">
               <a:buNone/>
               <a:defRPr sz="2000"/>
             </a:lvl9pPr>
           </a:lstStyle>
           <a:p>
-            <a:pPr lvl="0"/>
-            <a:r>
-              <a:rPr lang="zh-TW" altLang="en-US" noProof="0" smtClean="0"/>
-              <a:t>按一下圖示以新增圖片</a:t>
-            </a:r>
-            <a:endParaRPr lang="en-US" noProof="0"/>
-          </a:p>
-        </p:txBody>
-      </p:sp>
-      <p:sp>
-        <p:nvSpPr>
-          <p:cNvPr id="4" name="Text Placeholder 3"/>
+            <a:r>
+              <a:rPr lang="en-US" altLang="zh-TW"/>
+              <a:t>Click icon to add picture</a:t>
+            </a:r>
+            <a:endParaRPr lang="zh-TW" altLang="en-US"/>
+          </a:p>
+        </p:txBody>
+      </p:sp>
+      <p:sp>
+        <p:nvSpPr>
+          <p:cNvPr id="4" name="文字版面配置區 3"/>
           <p:cNvSpPr>
             <a:spLocks noGrp="1"/>
           </p:cNvSpPr>
@@ -2516,8 +2463,8 @@
         </p:nvSpPr>
         <p:spPr>
           <a:xfrm>
-            <a:off x="1792288" y="5367338"/>
-            <a:ext cx="5486400" cy="804862"/>
+            <a:off x="2389717" y="5367341"/>
+            <a:ext cx="7315200" cy="804863"/>
           </a:xfrm>
         </p:spPr>
         <p:txBody>
@@ -2527,35 +2474,35 @@
               <a:buNone/>
               <a:defRPr sz="1400"/>
             </a:lvl1pPr>
-            <a:lvl2pPr marL="457200" indent="0">
+            <a:lvl2pPr marL="457189" indent="0">
               <a:buNone/>
               <a:defRPr sz="1200"/>
             </a:lvl2pPr>
-            <a:lvl3pPr marL="914400" indent="0">
+            <a:lvl3pPr marL="914378" indent="0">
               <a:buNone/>
               <a:defRPr sz="1000"/>
             </a:lvl3pPr>
-            <a:lvl4pPr marL="1371600" indent="0">
+            <a:lvl4pPr marL="1371566" indent="0">
               <a:buNone/>
               <a:defRPr sz="900"/>
             </a:lvl4pPr>
-            <a:lvl5pPr marL="1828800" indent="0">
+            <a:lvl5pPr marL="1828754" indent="0">
               <a:buNone/>
               <a:defRPr sz="900"/>
             </a:lvl5pPr>
-            <a:lvl6pPr marL="2286000" indent="0">
+            <a:lvl6pPr marL="2285943" indent="0">
               <a:buNone/>
               <a:defRPr sz="900"/>
             </a:lvl6pPr>
-            <a:lvl7pPr marL="2743200" indent="0">
+            <a:lvl7pPr marL="2743132" indent="0">
               <a:buNone/>
               <a:defRPr sz="900"/>
             </a:lvl7pPr>
-            <a:lvl8pPr marL="3200400" indent="0">
+            <a:lvl8pPr marL="3200320" indent="0">
               <a:buNone/>
               <a:defRPr sz="900"/>
             </a:lvl8pPr>
-            <a:lvl9pPr marL="3657600" indent="0">
+            <a:lvl9pPr marL="3657509" indent="0">
               <a:buNone/>
               <a:defRPr sz="900"/>
             </a:lvl9pPr>
@@ -2563,15 +2510,15 @@
           <a:p>
             <a:pPr lvl="0"/>
             <a:r>
-              <a:rPr lang="zh-TW" altLang="en-US" smtClean="0"/>
-              <a:t>按一下以編輯母片文字樣式</a:t>
-            </a:r>
-          </a:p>
-        </p:txBody>
-      </p:sp>
-      <p:sp>
-        <p:nvSpPr>
-          <p:cNvPr id="5" name="Date Placeholder 3"/>
+              <a:rPr lang="en-US" altLang="zh-TW"/>
+              <a:t>Click to edit Master text styles</a:t>
+            </a:r>
+          </a:p>
+        </p:txBody>
+      </p:sp>
+      <p:sp>
+        <p:nvSpPr>
+          <p:cNvPr id="5" name="日期版面配置區 4"/>
           <p:cNvSpPr>
             <a:spLocks noGrp="1"/>
           </p:cNvSpPr>
@@ -2582,15 +2529,11 @@
         <p:spPr/>
         <p:txBody>
           <a:bodyPr/>
-          <a:lstStyle>
-            <a:lvl1pPr>
-              <a:defRPr/>
-            </a:lvl1pPr>
-          </a:lstStyle>
+          <a:lstStyle/>
           <a:p>
             <a:fld id="{D7BEA608-7224-4CE8-8283-282EDC8021C2}" type="datetimeFigureOut">
               <a:rPr lang="zh-TW" altLang="en-US" smtClean="0"/>
-              <a:t>2014/7/19</a:t>
+              <a:t>2025/4/16</a:t>
             </a:fld>
             <a:endParaRPr lang="zh-TW" altLang="en-US"/>
           </a:p>
@@ -2598,7 +2541,7 @@
       </p:sp>
       <p:sp>
         <p:nvSpPr>
-          <p:cNvPr id="6" name="Footer Placeholder 4"/>
+          <p:cNvPr id="6" name="頁尾版面配置區 5"/>
           <p:cNvSpPr>
             <a:spLocks noGrp="1"/>
           </p:cNvSpPr>
@@ -2609,19 +2552,15 @@
         <p:spPr/>
         <p:txBody>
           <a:bodyPr/>
-          <a:lstStyle>
-            <a:lvl1pPr>
-              <a:defRPr/>
-            </a:lvl1pPr>
-          </a:lstStyle>
-          <a:p>
-            <a:endParaRPr lang="zh-TW" altLang="en-US"/>
-          </a:p>
-        </p:txBody>
-      </p:sp>
-      <p:sp>
-        <p:nvSpPr>
-          <p:cNvPr id="7" name="Slide Number Placeholder 5"/>
+          <a:lstStyle/>
+          <a:p>
+            <a:endParaRPr lang="zh-TW" altLang="en-US"/>
+          </a:p>
+        </p:txBody>
+      </p:sp>
+      <p:sp>
+        <p:nvSpPr>
+          <p:cNvPr id="7" name="投影片編號版面配置區 6"/>
           <p:cNvSpPr>
             <a:spLocks noGrp="1"/>
           </p:cNvSpPr>
@@ -2632,11 +2571,7 @@
         <p:spPr/>
         <p:txBody>
           <a:bodyPr/>
-          <a:lstStyle>
-            <a:lvl1pPr>
-              <a:defRPr/>
-            </a:lvl1pPr>
-          </a:lstStyle>
+          <a:lstStyle/>
           <a:p>
             <a:fld id="{D22BDFD0-99D4-44A5-A06A-7B0304E2794B}" type="slidenum">
               <a:rPr lang="zh-TW" altLang="en-US" smtClean="0"/>
@@ -2647,6 +2582,11 @@
         </p:txBody>
       </p:sp>
     </p:spTree>
+    <p:extLst>
+      <p:ext uri="{BB962C8B-B14F-4D97-AF65-F5344CB8AC3E}">
+        <p14:creationId xmlns:p14="http://schemas.microsoft.com/office/powerpoint/2010/main" val="4071663860"/>
+      </p:ext>
+    </p:extLst>
   </p:cSld>
   <p:clrMapOvr>
     <a:masterClrMapping/>
@@ -2660,13 +2600,9 @@
     <p:bg>
       <p:bgPr>
         <a:blipFill dpi="0" rotWithShape="1">
-          <a:blip r:embed="rId13">
-            <a:lum/>
-          </a:blip>
+          <a:blip r:embed="rId13"/>
           <a:srcRect/>
-          <a:stretch>
-            <a:fillRect l="-21000" r="-21000"/>
-          </a:stretch>
+          <a:tile tx="0" ty="0" sx="100000" sy="100000" flip="none" algn="tl"/>
         </a:blipFill>
         <a:effectLst/>
       </p:bgPr>
@@ -2687,226 +2623,111 @@
       </p:grpSpPr>
       <p:sp>
         <p:nvSpPr>
-          <p:cNvPr id="1026" name="Title Placeholder 1"/>
+          <p:cNvPr id="2" name="標題版面配置區 1"/>
           <p:cNvSpPr>
             <a:spLocks noGrp="1"/>
           </p:cNvSpPr>
           <p:nvPr>
             <p:ph type="title"/>
-          </p:nvPr>
-        </p:nvSpPr>
-        <p:spPr bwMode="auto">
-          <a:xfrm>
-            <a:off x="457200" y="274638"/>
-            <a:ext cx="8229600" cy="1143000"/>
-          </a:xfrm>
-          <a:prstGeom prst="rect">
-            <a:avLst/>
-          </a:prstGeom>
-          <a:noFill/>
-          <a:ln w="9525">
-            <a:noFill/>
-            <a:miter lim="800000"/>
-            <a:headEnd/>
-            <a:tailEnd/>
-          </a:ln>
-        </p:spPr>
-        <p:txBody>
-          <a:bodyPr vert="horz" wrap="square" lIns="91440" tIns="45720" rIns="91440" bIns="45720" numCol="1" anchor="ctr" anchorCtr="0" compatLnSpc="1">
-            <a:prstTxWarp prst="textNoShape">
-              <a:avLst/>
-            </a:prstTxWarp>
-          </a:bodyPr>
-          <a:lstStyle/>
-          <a:p>
-            <a:pPr lvl="0"/>
-            <a:r>
-              <a:rPr lang="zh-TW" altLang="en-US" smtClean="0"/>
-              <a:t>按一下以編輯母片標題樣式</a:t>
-            </a:r>
-            <a:endParaRPr lang="en-US" altLang="zh-TW" smtClean="0"/>
-          </a:p>
-        </p:txBody>
-      </p:sp>
-      <p:sp>
-        <p:nvSpPr>
-          <p:cNvPr id="1027" name="Text Placeholder 2"/>
-          <p:cNvSpPr>
-            <a:spLocks noGrp="1"/>
-          </p:cNvSpPr>
-          <p:nvPr>
-            <p:ph type="body" idx="1"/>
-          </p:nvPr>
-        </p:nvSpPr>
-        <p:spPr bwMode="auto">
-          <a:xfrm>
-            <a:off x="457200" y="1600200"/>
-            <a:ext cx="8229600" cy="4525963"/>
-          </a:xfrm>
-          <a:prstGeom prst="rect">
-            <a:avLst/>
-          </a:prstGeom>
-          <a:noFill/>
-          <a:ln w="9525">
-            <a:noFill/>
-            <a:miter lim="800000"/>
-            <a:headEnd/>
-            <a:tailEnd/>
-          </a:ln>
-        </p:spPr>
-        <p:txBody>
-          <a:bodyPr vert="horz" wrap="square" lIns="91440" tIns="45720" rIns="91440" bIns="45720" numCol="1" anchor="t" anchorCtr="0" compatLnSpc="1">
-            <a:prstTxWarp prst="textNoShape">
-              <a:avLst/>
-            </a:prstTxWarp>
-          </a:bodyPr>
-          <a:lstStyle/>
-          <a:p>
-            <a:pPr lvl="0"/>
-            <a:r>
-              <a:rPr lang="zh-TW" altLang="en-US" smtClean="0"/>
-              <a:t>按一下以編輯母片文字樣式</a:t>
-            </a:r>
-          </a:p>
-          <a:p>
-            <a:pPr lvl="1"/>
-            <a:r>
-              <a:rPr lang="zh-TW" altLang="en-US" smtClean="0"/>
-              <a:t>第二層</a:t>
-            </a:r>
-          </a:p>
-          <a:p>
-            <a:pPr lvl="2"/>
-            <a:r>
-              <a:rPr lang="zh-TW" altLang="en-US" smtClean="0"/>
-              <a:t>第三層</a:t>
-            </a:r>
-          </a:p>
-          <a:p>
-            <a:pPr lvl="3"/>
-            <a:r>
-              <a:rPr lang="zh-TW" altLang="en-US" smtClean="0"/>
-              <a:t>第四層</a:t>
-            </a:r>
-          </a:p>
-          <a:p>
-            <a:pPr lvl="4"/>
-            <a:r>
-              <a:rPr lang="zh-TW" altLang="en-US" smtClean="0"/>
-              <a:t>第五層</a:t>
-            </a:r>
-            <a:endParaRPr lang="en-US" altLang="zh-TW" smtClean="0"/>
-          </a:p>
-        </p:txBody>
-      </p:sp>
-      <p:sp>
-        <p:nvSpPr>
-          <p:cNvPr id="4" name="Date Placeholder 3"/>
-          <p:cNvSpPr>
-            <a:spLocks noGrp="1"/>
-          </p:cNvSpPr>
-          <p:nvPr>
-            <p:ph type="dt" sz="half" idx="2"/>
           </p:nvPr>
         </p:nvSpPr>
         <p:spPr>
           <a:xfrm>
-            <a:off x="457200" y="6356350"/>
-            <a:ext cx="2133600" cy="365125"/>
+            <a:off x="609600" y="274637"/>
+            <a:ext cx="10972800" cy="1143000"/>
           </a:xfrm>
           <a:prstGeom prst="rect">
             <a:avLst/>
           </a:prstGeom>
         </p:spPr>
         <p:txBody>
-          <a:bodyPr vert="horz" lIns="91440" tIns="45720" rIns="91440" bIns="45720" rtlCol="0" anchor="ctr"/>
-          <a:lstStyle>
-            <a:lvl1pPr algn="l" fontAlgn="auto">
-              <a:spcBef>
-                <a:spcPts val="0"/>
-              </a:spcBef>
-              <a:spcAft>
-                <a:spcPts val="0"/>
-              </a:spcAft>
-              <a:defRPr kumimoji="0" sz="1200" smtClean="0">
-                <a:solidFill>
-                  <a:schemeClr val="tx1">
-                    <a:tint val="75000"/>
-                  </a:schemeClr>
-                </a:solidFill>
-                <a:latin typeface="+mn-lt"/>
-                <a:ea typeface="+mn-ea"/>
-              </a:defRPr>
-            </a:lvl1pPr>
-          </a:lstStyle>
-          <a:p>
-            <a:fld id="{D7BEA608-7224-4CE8-8283-282EDC8021C2}" type="datetimeFigureOut">
-              <a:rPr lang="zh-TW" altLang="en-US" smtClean="0"/>
-              <a:t>2014/7/19</a:t>
-            </a:fld>
-            <a:endParaRPr lang="zh-TW" altLang="en-US"/>
-          </a:p>
-        </p:txBody>
-      </p:sp>
-      <p:sp>
-        <p:nvSpPr>
-          <p:cNvPr id="5" name="Footer Placeholder 4"/>
-          <p:cNvSpPr>
-            <a:spLocks noGrp="1"/>
-          </p:cNvSpPr>
-          <p:nvPr>
-            <p:ph type="ftr" sz="quarter" idx="3"/>
+          <a:bodyPr vert="horz" lIns="91440" tIns="45720" rIns="91440" bIns="45720" rtlCol="0" anchor="ctr">
+            <a:normAutofit/>
+          </a:bodyPr>
+          <a:lstStyle/>
+          <a:p>
+            <a:r>
+              <a:rPr lang="zh-TW" altLang="en-US"/>
+              <a:t>按一下以編輯母片標題樣式</a:t>
+            </a:r>
+          </a:p>
+        </p:txBody>
+      </p:sp>
+      <p:sp>
+        <p:nvSpPr>
+          <p:cNvPr id="3" name="文字版面配置區 2"/>
+          <p:cNvSpPr>
+            <a:spLocks noGrp="1"/>
+          </p:cNvSpPr>
+          <p:nvPr>
+            <p:ph type="body" idx="1"/>
           </p:nvPr>
         </p:nvSpPr>
         <p:spPr>
           <a:xfrm>
-            <a:off x="3124200" y="6356350"/>
-            <a:ext cx="2895600" cy="365125"/>
+            <a:off x="609600" y="1600203"/>
+            <a:ext cx="10972800" cy="4525963"/>
           </a:xfrm>
           <a:prstGeom prst="rect">
             <a:avLst/>
           </a:prstGeom>
         </p:spPr>
         <p:txBody>
-          <a:bodyPr vert="horz" lIns="91440" tIns="45720" rIns="91440" bIns="45720" rtlCol="0" anchor="ctr"/>
-          <a:lstStyle>
-            <a:lvl1pPr algn="ctr" fontAlgn="auto">
-              <a:spcBef>
-                <a:spcPts val="0"/>
-              </a:spcBef>
-              <a:spcAft>
-                <a:spcPts val="0"/>
-              </a:spcAft>
-              <a:defRPr kumimoji="0" sz="1200">
-                <a:solidFill>
-                  <a:schemeClr val="tx1">
-                    <a:tint val="75000"/>
-                  </a:schemeClr>
-                </a:solidFill>
-                <a:latin typeface="+mn-lt"/>
-                <a:ea typeface="+mn-ea"/>
-              </a:defRPr>
-            </a:lvl1pPr>
-          </a:lstStyle>
-          <a:p>
-            <a:endParaRPr lang="zh-TW" altLang="en-US"/>
-          </a:p>
-        </p:txBody>
-      </p:sp>
-      <p:sp>
-        <p:nvSpPr>
-          <p:cNvPr id="6" name="Slide Number Placeholder 5"/>
-          <p:cNvSpPr>
-            <a:spLocks noGrp="1"/>
-          </p:cNvSpPr>
-          <p:nvPr>
-            <p:ph type="sldNum" sz="quarter" idx="4"/>
+          <a:bodyPr vert="horz" lIns="91440" tIns="45720" rIns="91440" bIns="45720" rtlCol="0">
+            <a:normAutofit/>
+          </a:bodyPr>
+          <a:lstStyle/>
+          <a:p>
+            <a:pPr lvl="0"/>
+            <a:r>
+              <a:rPr lang="zh-TW" altLang="en-US"/>
+              <a:t>按一下以編輯母片文字樣式</a:t>
+            </a:r>
+          </a:p>
+          <a:p>
+            <a:pPr lvl="1"/>
+            <a:r>
+              <a:rPr lang="zh-TW" altLang="en-US"/>
+              <a:t>第二層</a:t>
+            </a:r>
+          </a:p>
+          <a:p>
+            <a:pPr lvl="2"/>
+            <a:r>
+              <a:rPr lang="zh-TW" altLang="en-US"/>
+              <a:t>第三層</a:t>
+            </a:r>
+          </a:p>
+          <a:p>
+            <a:pPr lvl="3"/>
+            <a:r>
+              <a:rPr lang="zh-TW" altLang="en-US"/>
+              <a:t>第四層</a:t>
+            </a:r>
+          </a:p>
+          <a:p>
+            <a:pPr lvl="4"/>
+            <a:r>
+              <a:rPr lang="zh-TW" altLang="en-US"/>
+              <a:t>第五層</a:t>
+            </a:r>
+          </a:p>
+        </p:txBody>
+      </p:sp>
+      <p:sp>
+        <p:nvSpPr>
+          <p:cNvPr id="4" name="日期版面配置區 3"/>
+          <p:cNvSpPr>
+            <a:spLocks noGrp="1"/>
+          </p:cNvSpPr>
+          <p:nvPr>
+            <p:ph type="dt" sz="half" idx="2"/>
           </p:nvPr>
         </p:nvSpPr>
         <p:spPr>
           <a:xfrm>
-            <a:off x="6553200" y="6356350"/>
-            <a:ext cx="2133600" cy="365125"/>
+            <a:off x="609600" y="6356354"/>
+            <a:ext cx="2844800" cy="365125"/>
           </a:xfrm>
           <a:prstGeom prst="rect">
             <a:avLst/>
@@ -2915,21 +2736,91 @@
         <p:txBody>
           <a:bodyPr vert="horz" lIns="91440" tIns="45720" rIns="91440" bIns="45720" rtlCol="0" anchor="ctr"/>
           <a:lstStyle>
-            <a:lvl1pPr algn="r" fontAlgn="auto">
-              <a:spcBef>
-                <a:spcPts val="0"/>
-              </a:spcBef>
-              <a:spcAft>
-                <a:spcPts val="0"/>
-              </a:spcAft>
-              <a:defRPr kumimoji="0" sz="1200" smtClean="0">
+            <a:lvl1pPr algn="l">
+              <a:defRPr sz="1200">
                 <a:solidFill>
                   <a:schemeClr val="tx1">
                     <a:tint val="75000"/>
                   </a:schemeClr>
                 </a:solidFill>
-                <a:latin typeface="+mn-lt"/>
-                <a:ea typeface="+mn-ea"/>
+              </a:defRPr>
+            </a:lvl1pPr>
+          </a:lstStyle>
+          <a:p>
+            <a:fld id="{D7BEA608-7224-4CE8-8283-282EDC8021C2}" type="datetimeFigureOut">
+              <a:rPr lang="zh-TW" altLang="en-US" smtClean="0"/>
+              <a:t>2025/4/16</a:t>
+            </a:fld>
+            <a:endParaRPr lang="zh-TW" altLang="en-US"/>
+          </a:p>
+        </p:txBody>
+      </p:sp>
+      <p:sp>
+        <p:nvSpPr>
+          <p:cNvPr id="5" name="頁尾版面配置區 4"/>
+          <p:cNvSpPr>
+            <a:spLocks noGrp="1"/>
+          </p:cNvSpPr>
+          <p:nvPr>
+            <p:ph type="ftr" sz="quarter" idx="3"/>
+          </p:nvPr>
+        </p:nvSpPr>
+        <p:spPr>
+          <a:xfrm>
+            <a:off x="4165600" y="6356354"/>
+            <a:ext cx="3860800" cy="365125"/>
+          </a:xfrm>
+          <a:prstGeom prst="rect">
+            <a:avLst/>
+          </a:prstGeom>
+        </p:spPr>
+        <p:txBody>
+          <a:bodyPr vert="horz" lIns="91440" tIns="45720" rIns="91440" bIns="45720" rtlCol="0" anchor="ctr"/>
+          <a:lstStyle>
+            <a:lvl1pPr algn="ctr">
+              <a:defRPr sz="1200">
+                <a:solidFill>
+                  <a:schemeClr val="tx1">
+                    <a:tint val="75000"/>
+                  </a:schemeClr>
+                </a:solidFill>
+              </a:defRPr>
+            </a:lvl1pPr>
+          </a:lstStyle>
+          <a:p>
+            <a:endParaRPr lang="zh-TW" altLang="en-US"/>
+          </a:p>
+        </p:txBody>
+      </p:sp>
+      <p:sp>
+        <p:nvSpPr>
+          <p:cNvPr id="6" name="投影片編號版面配置區 5"/>
+          <p:cNvSpPr>
+            <a:spLocks noGrp="1"/>
+          </p:cNvSpPr>
+          <p:nvPr>
+            <p:ph type="sldNum" sz="quarter" idx="4"/>
+          </p:nvPr>
+        </p:nvSpPr>
+        <p:spPr>
+          <a:xfrm>
+            <a:off x="8737600" y="6356354"/>
+            <a:ext cx="2844800" cy="365125"/>
+          </a:xfrm>
+          <a:prstGeom prst="rect">
+            <a:avLst/>
+          </a:prstGeom>
+        </p:spPr>
+        <p:txBody>
+          <a:bodyPr vert="horz" lIns="91440" tIns="45720" rIns="91440" bIns="45720" rtlCol="0" anchor="ctr"/>
+          <a:lstStyle>
+            <a:lvl1pPr algn="r">
+              <a:defRPr sz="1200">
+                <a:solidFill>
+                  <a:schemeClr val="tx1">
+                    <a:tint val="75000"/>
+                  </a:schemeClr>
+                </a:solidFill>
               </a:defRPr>
             </a:lvl1pPr>
           </a:lstStyle>
@@ -2943,30 +2834,33 @@
         </p:txBody>
       </p:sp>
     </p:spTree>
+    <p:extLst>
+      <p:ext uri="{BB962C8B-B14F-4D97-AF65-F5344CB8AC3E}">
+        <p14:creationId xmlns:p14="http://schemas.microsoft.com/office/powerpoint/2010/main" val="1140817012"/>
+      </p:ext>
+    </p:extLst>
   </p:cSld>
   <p:clrMap bg1="lt1" tx1="dk1" bg2="lt2" tx2="dk2" accent1="accent1" accent2="accent2" accent3="accent3" accent4="accent4" accent5="accent5" accent6="accent6" hlink="hlink" folHlink="folHlink"/>
   <p:sldLayoutIdLst>
-    <p:sldLayoutId id="2147483661" r:id="rId1"/>
-    <p:sldLayoutId id="2147483662" r:id="rId2"/>
-    <p:sldLayoutId id="2147483663" r:id="rId3"/>
-    <p:sldLayoutId id="2147483664" r:id="rId4"/>
-    <p:sldLayoutId id="2147483665" r:id="rId5"/>
-    <p:sldLayoutId id="2147483666" r:id="rId6"/>
-    <p:sldLayoutId id="2147483667" r:id="rId7"/>
-    <p:sldLayoutId id="2147483668" r:id="rId8"/>
-    <p:sldLayoutId id="2147483669" r:id="rId9"/>
-    <p:sldLayoutId id="2147483670" r:id="rId10"/>
-    <p:sldLayoutId id="2147483671" r:id="rId11"/>
+    <p:sldLayoutId id="2147483673" r:id="rId1"/>
+    <p:sldLayoutId id="2147483674" r:id="rId2"/>
+    <p:sldLayoutId id="2147483675" r:id="rId3"/>
+    <p:sldLayoutId id="2147483676" r:id="rId4"/>
+    <p:sldLayoutId id="2147483677" r:id="rId5"/>
+    <p:sldLayoutId id="2147483678" r:id="rId6"/>
+    <p:sldLayoutId id="2147483679" r:id="rId7"/>
+    <p:sldLayoutId id="2147483680" r:id="rId8"/>
+    <p:sldLayoutId id="2147483681" r:id="rId9"/>
+    <p:sldLayoutId id="2147483682" r:id="rId10"/>
+    <p:sldLayoutId id="2147483683" r:id="rId11"/>
   </p:sldLayoutIdLst>
   <p:txStyles>
     <p:titleStyle>
-      <a:lvl1pPr algn="ctr" rtl="0" eaLnBrk="1" fontAlgn="base" hangingPunct="1">
+      <a:lvl1pPr algn="ctr" defTabSz="914378" rtl="0" eaLnBrk="1" latinLnBrk="0" hangingPunct="1">
         <a:spcBef>
           <a:spcPct val="0"/>
         </a:spcBef>
-        <a:spcAft>
-          <a:spcPct val="0"/>
-        </a:spcAft>
+        <a:buNone/>
         <a:defRPr sz="4400" kern="1200">
           <a:solidFill>
             <a:schemeClr val="tx1"/>
@@ -2976,128 +2870,13 @@
           <a:cs typeface="+mj-cs"/>
         </a:defRPr>
       </a:lvl1pPr>
-      <a:lvl2pPr algn="ctr" rtl="0" eaLnBrk="1" fontAlgn="base" hangingPunct="1">
-        <a:spcBef>
-          <a:spcPct val="0"/>
-        </a:spcBef>
-        <a:spcAft>
-          <a:spcPct val="0"/>
-        </a:spcAft>
-        <a:defRPr sz="4400">
-          <a:solidFill>
-            <a:schemeClr val="tx1"/>
-          </a:solidFill>
-          <a:latin typeface="Calibri" pitchFamily="34" charset="0"/>
-        </a:defRPr>
-      </a:lvl2pPr>
-      <a:lvl3pPr algn="ctr" rtl="0" eaLnBrk="1" fontAlgn="base" hangingPunct="1">
-        <a:spcBef>
-          <a:spcPct val="0"/>
-        </a:spcBef>
-        <a:spcAft>
-          <a:spcPct val="0"/>
-        </a:spcAft>
-        <a:defRPr sz="4400">
-          <a:solidFill>
-            <a:schemeClr val="tx1"/>
-          </a:solidFill>
-          <a:latin typeface="Calibri" pitchFamily="34" charset="0"/>
-        </a:defRPr>
-      </a:lvl3pPr>
-      <a:lvl4pPr algn="ctr" rtl="0" eaLnBrk="1" fontAlgn="base" hangingPunct="1">
-        <a:spcBef>
-          <a:spcPct val="0"/>
-        </a:spcBef>
-        <a:spcAft>
-          <a:spcPct val="0"/>
-        </a:spcAft>
-        <a:defRPr sz="4400">
-          <a:solidFill>
-            <a:schemeClr val="tx1"/>
-          </a:solidFill>
-          <a:latin typeface="Calibri" pitchFamily="34" charset="0"/>
-        </a:defRPr>
-      </a:lvl4pPr>
-      <a:lvl5pPr algn="ctr" rtl="0" eaLnBrk="1" fontAlgn="base" hangingPunct="1">
-        <a:spcBef>
-          <a:spcPct val="0"/>
-        </a:spcBef>
-        <a:spcAft>
-          <a:spcPct val="0"/>
-        </a:spcAft>
-        <a:defRPr sz="4400">
-          <a:solidFill>
-            <a:schemeClr val="tx1"/>
-          </a:solidFill>
-          <a:latin typeface="Calibri" pitchFamily="34" charset="0"/>
-        </a:defRPr>
-      </a:lvl5pPr>
-      <a:lvl6pPr marL="457200" algn="ctr" rtl="0" eaLnBrk="1" fontAlgn="base" hangingPunct="1">
-        <a:spcBef>
-          <a:spcPct val="0"/>
-        </a:spcBef>
-        <a:spcAft>
-          <a:spcPct val="0"/>
-        </a:spcAft>
-        <a:defRPr sz="4400">
-          <a:solidFill>
-            <a:schemeClr val="tx1"/>
-          </a:solidFill>
-          <a:latin typeface="Calibri" pitchFamily="34" charset="0"/>
-        </a:defRPr>
-      </a:lvl6pPr>
-      <a:lvl7pPr marL="914400" algn="ctr" rtl="0" eaLnBrk="1" fontAlgn="base" hangingPunct="1">
-        <a:spcBef>
-          <a:spcPct val="0"/>
-        </a:spcBef>
-        <a:spcAft>
-          <a:spcPct val="0"/>
-        </a:spcAft>
-        <a:defRPr sz="4400">
-          <a:solidFill>
-            <a:schemeClr val="tx1"/>
-          </a:solidFill>
-          <a:latin typeface="Calibri" pitchFamily="34" charset="0"/>
-        </a:defRPr>
-      </a:lvl7pPr>
-      <a:lvl8pPr marL="1371600" algn="ctr" rtl="0" eaLnBrk="1" fontAlgn="base" hangingPunct="1">
-        <a:spcBef>
-          <a:spcPct val="0"/>
-        </a:spcBef>
-        <a:spcAft>
-          <a:spcPct val="0"/>
-        </a:spcAft>
-        <a:defRPr sz="4400">
-          <a:solidFill>
-            <a:schemeClr val="tx1"/>
-          </a:solidFill>
-          <a:latin typeface="Calibri" pitchFamily="34" charset="0"/>
-        </a:defRPr>
-      </a:lvl8pPr>
-      <a:lvl9pPr marL="1828800" algn="ctr" rtl="0" eaLnBrk="1" fontAlgn="base" hangingPunct="1">
-        <a:spcBef>
-          <a:spcPct val="0"/>
-        </a:spcBef>
-        <a:spcAft>
-          <a:spcPct val="0"/>
-        </a:spcAft>
-        <a:defRPr sz="4400">
-          <a:solidFill>
-            <a:schemeClr val="tx1"/>
-          </a:solidFill>
-          <a:latin typeface="Calibri" pitchFamily="34" charset="0"/>
-        </a:defRPr>
-      </a:lvl9pPr>
     </p:titleStyle>
     <p:bodyStyle>
-      <a:lvl1pPr marL="342900" indent="-342900" algn="l" rtl="0" eaLnBrk="1" fontAlgn="base" hangingPunct="1">
+      <a:lvl1pPr marL="342892" indent="-342892" algn="l" defTabSz="914378" rtl="0" eaLnBrk="1" latinLnBrk="0" hangingPunct="1">
         <a:spcBef>
           <a:spcPct val="20000"/>
         </a:spcBef>
-        <a:spcAft>
-          <a:spcPct val="0"/>
-        </a:spcAft>
-        <a:buFont typeface="Arial" charset="0"/>
+        <a:buFont typeface="Arial" panose="02080604020202020204" pitchFamily="34" charset="0"/>
         <a:buChar char="•"/>
         <a:defRPr sz="3200" kern="1200">
           <a:solidFill>
@@ -3108,14 +2887,11 @@
           <a:cs typeface="+mn-cs"/>
         </a:defRPr>
       </a:lvl1pPr>
-      <a:lvl2pPr marL="742950" indent="-285750" algn="l" rtl="0" eaLnBrk="1" fontAlgn="base" hangingPunct="1">
+      <a:lvl2pPr marL="742931" indent="-285743" algn="l" defTabSz="914378" rtl="0" eaLnBrk="1" latinLnBrk="0" hangingPunct="1">
         <a:spcBef>
           <a:spcPct val="20000"/>
         </a:spcBef>
-        <a:spcAft>
-          <a:spcPct val="0"/>
-        </a:spcAft>
-        <a:buFont typeface="Arial" charset="0"/>
+        <a:buFont typeface="Arial" panose="02080604020202020204" pitchFamily="34" charset="0"/>
         <a:buChar char="–"/>
         <a:defRPr sz="2800" kern="1200">
           <a:solidFill>
@@ -3126,14 +2902,11 @@
           <a:cs typeface="+mn-cs"/>
         </a:defRPr>
       </a:lvl2pPr>
-      <a:lvl3pPr marL="1143000" indent="-228600" algn="l" rtl="0" eaLnBrk="1" fontAlgn="base" hangingPunct="1">
+      <a:lvl3pPr marL="1142972" indent="-228594" algn="l" defTabSz="914378" rtl="0" eaLnBrk="1" latinLnBrk="0" hangingPunct="1">
         <a:spcBef>
           <a:spcPct val="20000"/>
         </a:spcBef>
-        <a:spcAft>
-          <a:spcPct val="0"/>
-        </a:spcAft>
-        <a:buFont typeface="Arial" charset="0"/>
+        <a:buFont typeface="Arial" panose="02080604020202020204" pitchFamily="34" charset="0"/>
         <a:buChar char="•"/>
         <a:defRPr sz="2400" kern="1200">
           <a:solidFill>
@@ -3144,14 +2917,11 @@
           <a:cs typeface="+mn-cs"/>
         </a:defRPr>
       </a:lvl3pPr>
-      <a:lvl4pPr marL="1600200" indent="-228600" algn="l" rtl="0" eaLnBrk="1" fontAlgn="base" hangingPunct="1">
+      <a:lvl4pPr marL="1600160" indent="-228594" algn="l" defTabSz="914378" rtl="0" eaLnBrk="1" latinLnBrk="0" hangingPunct="1">
         <a:spcBef>
           <a:spcPct val="20000"/>
         </a:spcBef>
-        <a:spcAft>
-          <a:spcPct val="0"/>
-        </a:spcAft>
-        <a:buFont typeface="Arial" charset="0"/>
+        <a:buFont typeface="Arial" panose="02080604020202020204" pitchFamily="34" charset="0"/>
         <a:buChar char="–"/>
         <a:defRPr sz="2000" kern="1200">
           <a:solidFill>
@@ -3162,14 +2932,11 @@
           <a:cs typeface="+mn-cs"/>
         </a:defRPr>
       </a:lvl4pPr>
-      <a:lvl5pPr marL="2057400" indent="-228600" algn="l" rtl="0" eaLnBrk="1" fontAlgn="base" hangingPunct="1">
+      <a:lvl5pPr marL="2057348" indent="-228594" algn="l" defTabSz="914378" rtl="0" eaLnBrk="1" latinLnBrk="0" hangingPunct="1">
         <a:spcBef>
           <a:spcPct val="20000"/>
         </a:spcBef>
-        <a:spcAft>
-          <a:spcPct val="0"/>
-        </a:spcAft>
-        <a:buFont typeface="Arial" charset="0"/>
+        <a:buFont typeface="Arial" panose="02080604020202020204" pitchFamily="34" charset="0"/>
         <a:buChar char="»"/>
         <a:defRPr sz="2000" kern="1200">
           <a:solidFill>
@@ -3180,11 +2947,11 @@
           <a:cs typeface="+mn-cs"/>
         </a:defRPr>
       </a:lvl5pPr>
-      <a:lvl6pPr marL="2514600" indent="-228600" algn="l" defTabSz="914400" rtl="0" eaLnBrk="1" latinLnBrk="0" hangingPunct="1">
+      <a:lvl6pPr marL="2514537" indent="-228594" algn="l" defTabSz="914378" rtl="0" eaLnBrk="1" latinLnBrk="0" hangingPunct="1">
         <a:spcBef>
           <a:spcPct val="20000"/>
         </a:spcBef>
-        <a:buFont typeface="Arial" pitchFamily="34" charset="0"/>
+        <a:buFont typeface="Arial" panose="02080604020202020204" pitchFamily="34" charset="0"/>
         <a:buChar char="•"/>
         <a:defRPr sz="2000" kern="1200">
           <a:solidFill>
@@ -3195,11 +2962,11 @@
           <a:cs typeface="+mn-cs"/>
         </a:defRPr>
       </a:lvl6pPr>
-      <a:lvl7pPr marL="2971800" indent="-228600" algn="l" defTabSz="914400" rtl="0" eaLnBrk="1" latinLnBrk="0" hangingPunct="1">
+      <a:lvl7pPr marL="2971726" indent="-228594" algn="l" defTabSz="914378" rtl="0" eaLnBrk="1" latinLnBrk="0" hangingPunct="1">
         <a:spcBef>
           <a:spcPct val="20000"/>
         </a:spcBef>
-        <a:buFont typeface="Arial" pitchFamily="34" charset="0"/>
+        <a:buFont typeface="Arial" panose="02080604020202020204" pitchFamily="34" charset="0"/>
         <a:buChar char="•"/>
         <a:defRPr sz="2000" kern="1200">
           <a:solidFill>
@@ -3210,11 +2977,11 @@
           <a:cs typeface="+mn-cs"/>
         </a:defRPr>
       </a:lvl7pPr>
-      <a:lvl8pPr marL="3429000" indent="-228600" algn="l" defTabSz="914400" rtl="0" eaLnBrk="1" latinLnBrk="0" hangingPunct="1">
+      <a:lvl8pPr marL="3428915" indent="-228594" algn="l" defTabSz="914378" rtl="0" eaLnBrk="1" latinLnBrk="0" hangingPunct="1">
         <a:spcBef>
           <a:spcPct val="20000"/>
         </a:spcBef>
-        <a:buFont typeface="Arial" pitchFamily="34" charset="0"/>
+        <a:buFont typeface="Arial" panose="02080604020202020204" pitchFamily="34" charset="0"/>
         <a:buChar char="•"/>
         <a:defRPr sz="2000" kern="1200">
           <a:solidFill>
@@ -3225,11 +2992,11 @@
           <a:cs typeface="+mn-cs"/>
         </a:defRPr>
       </a:lvl8pPr>
-      <a:lvl9pPr marL="3886200" indent="-228600" algn="l" defTabSz="914400" rtl="0" eaLnBrk="1" latinLnBrk="0" hangingPunct="1">
+      <a:lvl9pPr marL="3886103" indent="-228594" algn="l" defTabSz="914378" rtl="0" eaLnBrk="1" latinLnBrk="0" hangingPunct="1">
         <a:spcBef>
           <a:spcPct val="20000"/>
         </a:spcBef>
-        <a:buFont typeface="Arial" pitchFamily="34" charset="0"/>
+        <a:buFont typeface="Arial" panose="02080604020202020204" pitchFamily="34" charset="0"/>
         <a:buChar char="•"/>
         <a:defRPr sz="2000" kern="1200">
           <a:solidFill>
@@ -3243,9 +3010,9 @@
     </p:bodyStyle>
     <p:otherStyle>
       <a:defPPr>
-        <a:defRPr lang="en-US"/>
+        <a:defRPr lang="zh-TW"/>
       </a:defPPr>
-      <a:lvl1pPr marL="0" algn="l" defTabSz="914400" rtl="0" eaLnBrk="1" latinLnBrk="0" hangingPunct="1">
+      <a:lvl1pPr marL="0" algn="l" defTabSz="914378" rtl="0" eaLnBrk="1" latinLnBrk="0" hangingPunct="1">
         <a:defRPr sz="1800" kern="1200">
           <a:solidFill>
             <a:schemeClr val="tx1"/>
@@ -3255,7 +3022,7 @@
           <a:cs typeface="+mn-cs"/>
         </a:defRPr>
       </a:lvl1pPr>
-      <a:lvl2pPr marL="457200" algn="l" defTabSz="914400" rtl="0" eaLnBrk="1" latinLnBrk="0" hangingPunct="1">
+      <a:lvl2pPr marL="457189" algn="l" defTabSz="914378" rtl="0" eaLnBrk="1" latinLnBrk="0" hangingPunct="1">
         <a:defRPr sz="1800" kern="1200">
           <a:solidFill>
             <a:schemeClr val="tx1"/>
@@ -3265,7 +3032,7 @@
           <a:cs typeface="+mn-cs"/>
         </a:defRPr>
       </a:lvl2pPr>
-      <a:lvl3pPr marL="914400" algn="l" defTabSz="914400" rtl="0" eaLnBrk="1" latinLnBrk="0" hangingPunct="1">
+      <a:lvl3pPr marL="914378" algn="l" defTabSz="914378" rtl="0" eaLnBrk="1" latinLnBrk="0" hangingPunct="1">
         <a:defRPr sz="1800" kern="1200">
           <a:solidFill>
             <a:schemeClr val="tx1"/>
@@ -3275,7 +3042,7 @@
           <a:cs typeface="+mn-cs"/>
         </a:defRPr>
       </a:lvl3pPr>
-      <a:lvl4pPr marL="1371600" algn="l" defTabSz="914400" rtl="0" eaLnBrk="1" latinLnBrk="0" hangingPunct="1">
+      <a:lvl4pPr marL="1371566" algn="l" defTabSz="914378" rtl="0" eaLnBrk="1" latinLnBrk="0" hangingPunct="1">
         <a:defRPr sz="1800" kern="1200">
           <a:solidFill>
             <a:schemeClr val="tx1"/>
@@ -3285,7 +3052,7 @@
           <a:cs typeface="+mn-cs"/>
         </a:defRPr>
       </a:lvl4pPr>
-      <a:lvl5pPr marL="1828800" algn="l" defTabSz="914400" rtl="0" eaLnBrk="1" latinLnBrk="0" hangingPunct="1">
+      <a:lvl5pPr marL="1828754" algn="l" defTabSz="914378" rtl="0" eaLnBrk="1" latinLnBrk="0" hangingPunct="1">
         <a:defRPr sz="1800" kern="1200">
           <a:solidFill>
             <a:schemeClr val="tx1"/>
@@ -3295,7 +3062,7 @@
           <a:cs typeface="+mn-cs"/>
         </a:defRPr>
       </a:lvl5pPr>
-      <a:lvl6pPr marL="2286000" algn="l" defTabSz="914400" rtl="0" eaLnBrk="1" latinLnBrk="0" hangingPunct="1">
+      <a:lvl6pPr marL="2285943" algn="l" defTabSz="914378" rtl="0" eaLnBrk="1" latinLnBrk="0" hangingPunct="1">
         <a:defRPr sz="1800" kern="1200">
           <a:solidFill>
             <a:schemeClr val="tx1"/>
@@ -3305,7 +3072,7 @@
           <a:cs typeface="+mn-cs"/>
         </a:defRPr>
       </a:lvl6pPr>
-      <a:lvl7pPr marL="2743200" algn="l" defTabSz="914400" rtl="0" eaLnBrk="1" latinLnBrk="0" hangingPunct="1">
+      <a:lvl7pPr marL="2743132" algn="l" defTabSz="914378" rtl="0" eaLnBrk="1" latinLnBrk="0" hangingPunct="1">
         <a:defRPr sz="1800" kern="1200">
           <a:solidFill>
             <a:schemeClr val="tx1"/>
@@ -3315,7 +3082,7 @@
           <a:cs typeface="+mn-cs"/>
         </a:defRPr>
       </a:lvl7pPr>
-      <a:lvl8pPr marL="3200400" algn="l" defTabSz="914400" rtl="0" eaLnBrk="1" latinLnBrk="0" hangingPunct="1">
+      <a:lvl8pPr marL="3200320" algn="l" defTabSz="914378" rtl="0" eaLnBrk="1" latinLnBrk="0" hangingPunct="1">
         <a:defRPr sz="1800" kern="1200">
           <a:solidFill>
             <a:schemeClr val="tx1"/>
@@ -3325,7 +3092,7 @@
           <a:cs typeface="+mn-cs"/>
         </a:defRPr>
       </a:lvl8pPr>
-      <a:lvl9pPr marL="3657600" algn="l" defTabSz="914400" rtl="0" eaLnBrk="1" latinLnBrk="0" hangingPunct="1">
+      <a:lvl9pPr marL="3657509" algn="l" defTabSz="914378" rtl="0" eaLnBrk="1" latinLnBrk="0" hangingPunct="1">
         <a:defRPr sz="1800" kern="1200">
           <a:solidFill>
             <a:schemeClr val="tx1"/>
@@ -3345,7 +3112,13 @@
   <p:cSld>
     <p:spTree>
       <p:nvGrpSpPr>
-        <p:cNvPr id="1" name=""/>
+        <p:cNvPr id="1" name="">
+          <a:extLst>
+            <a:ext uri="{FF2B5EF4-FFF2-40B4-BE49-F238E27FC236}">
+              <a16:creationId xmlns:a16="http://schemas.microsoft.com/office/drawing/2014/main" id="{5F20F3D7-EDDF-CE30-9060-314A88E3730B}"/>
+            </a:ext>
+          </a:extLst>
+        </p:cNvPr>
         <p:cNvGrpSpPr/>
         <p:nvPr/>
       </p:nvGrpSpPr>
@@ -3359,7 +3132,13 @@
       </p:grpSpPr>
       <p:sp>
         <p:nvSpPr>
-          <p:cNvPr id="4" name="標題 3"/>
+          <p:cNvPr id="4" name="標題 3">
+            <a:extLst>
+              <a:ext uri="{FF2B5EF4-FFF2-40B4-BE49-F238E27FC236}">
+                <a16:creationId xmlns:a16="http://schemas.microsoft.com/office/drawing/2014/main" id="{CD6A41DD-B5E6-D530-EC0F-85726817D119}"/>
+              </a:ext>
+            </a:extLst>
+          </p:cNvPr>
           <p:cNvSpPr>
             <a:spLocks noGrp="1"/>
           </p:cNvSpPr>
@@ -3367,116 +3146,44 @@
             <p:ph type="title"/>
           </p:nvPr>
         </p:nvSpPr>
-        <p:spPr/>
-        <p:txBody>
-          <a:bodyPr/>
-          <a:lstStyle/>
-          <a:p>
-            <a:r>
-              <a:rPr lang="zh-TW" altLang="en-US" dirty="0"/>
+        <p:spPr>
+          <a:xfrm>
+            <a:off x="0" y="2660915"/>
+            <a:ext cx="12192000" cy="1143000"/>
+          </a:xfrm>
+        </p:spPr>
+        <p:txBody>
+          <a:bodyPr>
+            <a:noAutofit/>
+          </a:bodyPr>
+          <a:lstStyle/>
+          <a:p>
+            <a:r>
+              <a:rPr lang="zh-TW" altLang="en-US" sz="7200" b="1" i="1" dirty="0">
+                <a:solidFill>
+                  <a:srgbClr val="000066"/>
+                </a:solidFill>
+                <a:effectLst>
+                  <a:outerShdw blurRad="38100" dist="38100" dir="2700000" algn="tl">
+                    <a:srgbClr val="000000">
+                      <a:alpha val="43137"/>
+                    </a:srgbClr>
+                  </a:outerShdw>
+                </a:effectLst>
+                <a:latin typeface="微軟正黑體" pitchFamily="34" charset="-120"/>
+                <a:ea typeface="微軟正黑體" pitchFamily="34" charset="-120"/>
+              </a:rPr>
               <a:t>神羔羊</a:t>
             </a:r>
           </a:p>
         </p:txBody>
       </p:sp>
-      <p:sp>
-        <p:nvSpPr>
-          <p:cNvPr id="5" name="內容版面配置區 4"/>
-          <p:cNvSpPr>
-            <a:spLocks noGrp="1"/>
-          </p:cNvSpPr>
-          <p:nvPr>
-            <p:ph idx="1"/>
-          </p:nvPr>
-        </p:nvSpPr>
-        <p:spPr/>
-        <p:txBody>
-          <a:bodyPr>
-            <a:normAutofit/>
-          </a:bodyPr>
-          <a:lstStyle/>
-          <a:p>
-            <a:pPr algn="ctr">
-              <a:buNone/>
-            </a:pPr>
-            <a:r>
-              <a:rPr lang="zh-TW" altLang="en-US" sz="5400" dirty="0"/>
-              <a:t>至高</a:t>
-            </a:r>
-            <a:r>
-              <a:rPr lang="zh-TW" altLang="en-US" sz="5400" dirty="0" smtClean="0"/>
-              <a:t>權柄  至高神</a:t>
-            </a:r>
-            <a:endParaRPr lang="en-US" altLang="zh-TW" sz="5400" dirty="0" smtClean="0"/>
-          </a:p>
-          <a:p>
-            <a:pPr algn="ctr">
-              <a:buNone/>
-            </a:pPr>
-            <a:r>
-              <a:rPr lang="zh-TW" altLang="en-US" sz="5400" dirty="0" smtClean="0"/>
-              <a:t>超越</a:t>
-            </a:r>
-            <a:r>
-              <a:rPr lang="zh-TW" altLang="en-US" sz="5400" dirty="0"/>
-              <a:t>全</a:t>
-            </a:r>
-            <a:r>
-              <a:rPr lang="zh-TW" altLang="en-US" sz="5400" dirty="0" smtClean="0"/>
-              <a:t>地  一切</a:t>
-            </a:r>
-            <a:r>
-              <a:rPr lang="zh-TW" altLang="en-US" sz="5400" dirty="0"/>
-              <a:t>被造</a:t>
-            </a:r>
-            <a:r>
-              <a:rPr lang="zh-TW" altLang="en-US" sz="5400" dirty="0" smtClean="0"/>
-              <a:t>萬物</a:t>
-            </a:r>
-            <a:endParaRPr lang="en-US" altLang="zh-TW" sz="5400" dirty="0"/>
-          </a:p>
-          <a:p>
-            <a:pPr algn="ctr">
-              <a:buNone/>
-            </a:pPr>
-            <a:r>
-              <a:rPr lang="zh-TW" altLang="en-US" sz="5400" dirty="0" smtClean="0"/>
-              <a:t>至高智慧  高</a:t>
-            </a:r>
-            <a:r>
-              <a:rPr lang="zh-TW" altLang="en-US" sz="5400" dirty="0"/>
-              <a:t>過人的</a:t>
-            </a:r>
-            <a:r>
-              <a:rPr lang="zh-TW" altLang="en-US" sz="5400" dirty="0" smtClean="0"/>
-              <a:t>道路</a:t>
-            </a:r>
-            <a:endParaRPr lang="en-US" altLang="zh-TW" sz="5400" dirty="0" smtClean="0"/>
-          </a:p>
-          <a:p>
-            <a:pPr algn="ctr">
-              <a:buNone/>
-            </a:pPr>
-            <a:r>
-              <a:rPr lang="zh-TW" altLang="en-US" sz="5400" dirty="0" smtClean="0"/>
-              <a:t>唯有</a:t>
-            </a:r>
-            <a:r>
-              <a:rPr lang="zh-TW" altLang="en-US" sz="5400" dirty="0"/>
-              <a:t>你</a:t>
-            </a:r>
-            <a:r>
-              <a:rPr lang="zh-TW" altLang="en-US" sz="5400" dirty="0" smtClean="0"/>
-              <a:t>是  全知全能</a:t>
-            </a:r>
-            <a:r>
-              <a:rPr lang="zh-TW" altLang="en-US" sz="5400" dirty="0"/>
-              <a:t>神</a:t>
-            </a:r>
-          </a:p>
-        </p:txBody>
-      </p:sp>
     </p:spTree>
+    <p:extLst>
+      <p:ext uri="{BB962C8B-B14F-4D97-AF65-F5344CB8AC3E}">
+        <p14:creationId xmlns:p14="http://schemas.microsoft.com/office/powerpoint/2010/main" val="247508280"/>
+      </p:ext>
+    </p:extLst>
   </p:cSld>
   <p:clrMapOvr>
     <a:masterClrMapping/>
@@ -3489,7 +3196,13 @@
   <p:cSld>
     <p:spTree>
       <p:nvGrpSpPr>
-        <p:cNvPr id="1" name=""/>
+        <p:cNvPr id="1" name="">
+          <a:extLst>
+            <a:ext uri="{FF2B5EF4-FFF2-40B4-BE49-F238E27FC236}">
+              <a16:creationId xmlns:a16="http://schemas.microsoft.com/office/drawing/2014/main" id="{499F6A04-361B-D03C-72FC-83746A3861FC}"/>
+            </a:ext>
+          </a:extLst>
+        </p:cNvPr>
         <p:cNvGrpSpPr/>
         <p:nvPr/>
       </p:nvGrpSpPr>
@@ -3503,29 +3216,13 @@
       </p:grpSpPr>
       <p:sp>
         <p:nvSpPr>
-          <p:cNvPr id="4" name="標題 3"/>
-          <p:cNvSpPr>
-            <a:spLocks noGrp="1"/>
-          </p:cNvSpPr>
-          <p:nvPr>
-            <p:ph type="title"/>
-          </p:nvPr>
-        </p:nvSpPr>
-        <p:spPr/>
-        <p:txBody>
-          <a:bodyPr/>
-          <a:lstStyle/>
-          <a:p>
-            <a:r>
-              <a:rPr lang="zh-TW" altLang="en-US" dirty="0"/>
-              <a:t>神羔羊</a:t>
-            </a:r>
-          </a:p>
-        </p:txBody>
-      </p:sp>
-      <p:sp>
-        <p:nvSpPr>
-          <p:cNvPr id="5" name="內容版面配置區 4"/>
+          <p:cNvPr id="5" name="內容版面配置區 4">
+            <a:extLst>
+              <a:ext uri="{FF2B5EF4-FFF2-40B4-BE49-F238E27FC236}">
+                <a16:creationId xmlns:a16="http://schemas.microsoft.com/office/drawing/2014/main" id="{EE77592B-EE8B-614D-4160-CDFC7BCE80DB}"/>
+              </a:ext>
+            </a:extLst>
+          </p:cNvPr>
           <p:cNvSpPr>
             <a:spLocks noGrp="1"/>
           </p:cNvSpPr>
@@ -3533,9 +3230,14 @@
             <p:ph idx="1"/>
           </p:nvPr>
         </p:nvSpPr>
-        <p:spPr/>
-        <p:txBody>
-          <a:bodyPr>
+        <p:spPr>
+          <a:xfrm>
+            <a:off x="0" y="2084853"/>
+            <a:ext cx="12192000" cy="2404863"/>
+          </a:xfrm>
+        </p:spPr>
+        <p:txBody>
+          <a:bodyPr anchor="ctr">
             <a:normAutofit/>
           </a:bodyPr>
           <a:lstStyle/>
@@ -3544,83 +3246,107 @@
               <a:buNone/>
             </a:pPr>
             <a:r>
-              <a:rPr lang="zh-TW" altLang="en-US" sz="5400" dirty="0"/>
-              <a:t>至高</a:t>
-            </a:r>
-            <a:r>
-              <a:rPr lang="zh-TW" altLang="en-US" sz="5400" dirty="0" smtClean="0"/>
-              <a:t>國度  至高君</a:t>
-            </a:r>
-            <a:endParaRPr lang="en-US" altLang="zh-TW" sz="5400" dirty="0" smtClean="0"/>
+              <a:rPr lang="zh-TW" altLang="en-US" sz="6400" b="1" dirty="0">
+                <a:solidFill>
+                  <a:srgbClr val="000066"/>
+                </a:solidFill>
+                <a:latin typeface="微軟正黑體" pitchFamily="34" charset="-120"/>
+                <a:ea typeface="微軟正黑體" pitchFamily="34" charset="-120"/>
+              </a:rPr>
+              <a:t>至高權柄  至高神</a:t>
+            </a:r>
           </a:p>
           <a:p>
             <a:pPr algn="ctr">
               <a:buNone/>
             </a:pPr>
             <a:r>
-              <a:rPr lang="zh-TW" altLang="en-US" sz="5400" dirty="0" smtClean="0"/>
-              <a:t>超越</a:t>
-            </a:r>
-            <a:r>
-              <a:rPr lang="zh-TW" altLang="en-US" sz="5400" dirty="0"/>
-              <a:t>全</a:t>
-            </a:r>
-            <a:r>
-              <a:rPr lang="zh-TW" altLang="en-US" sz="5400" dirty="0" smtClean="0"/>
-              <a:t>地  一切</a:t>
-            </a:r>
-            <a:r>
-              <a:rPr lang="zh-TW" altLang="en-US" sz="5400" dirty="0"/>
-              <a:t>奇妙</a:t>
-            </a:r>
-            <a:r>
-              <a:rPr lang="zh-TW" altLang="en-US" sz="5400" dirty="0" smtClean="0"/>
-              <a:t>豐富</a:t>
-            </a:r>
-            <a:endParaRPr lang="en-US" altLang="zh-TW" sz="5400" dirty="0"/>
-          </a:p>
-          <a:p>
-            <a:pPr algn="ctr">
-              <a:buNone/>
-            </a:pPr>
-            <a:r>
-              <a:rPr lang="zh-TW" altLang="en-US" sz="5400" dirty="0" smtClean="0"/>
-              <a:t>至尊</a:t>
-            </a:r>
-            <a:r>
-              <a:rPr lang="zh-TW" altLang="en-US" sz="5400" dirty="0"/>
-              <a:t>至</a:t>
-            </a:r>
-            <a:r>
-              <a:rPr lang="zh-TW" altLang="en-US" sz="5400" dirty="0" smtClean="0"/>
-              <a:t>貴  勝過</a:t>
-            </a:r>
-            <a:r>
-              <a:rPr lang="zh-TW" altLang="en-US" sz="5400" dirty="0"/>
-              <a:t>世界</a:t>
-            </a:r>
-            <a:r>
-              <a:rPr lang="zh-TW" altLang="en-US" sz="5400" dirty="0" smtClean="0"/>
-              <a:t>財富</a:t>
-            </a:r>
-            <a:endParaRPr lang="en-US" altLang="zh-TW" sz="5400" dirty="0" smtClean="0"/>
-          </a:p>
-          <a:p>
-            <a:pPr algn="ctr">
-              <a:buNone/>
-            </a:pPr>
-            <a:r>
-              <a:rPr lang="zh-TW" altLang="en-US" sz="5400" dirty="0" smtClean="0"/>
-              <a:t>天上地下  唯一</a:t>
-            </a:r>
-            <a:r>
-              <a:rPr lang="zh-TW" altLang="en-US" sz="5400" dirty="0"/>
-              <a:t>的愛慕</a:t>
-            </a:r>
+              <a:rPr lang="zh-TW" altLang="en-US" sz="6400" b="1" dirty="0">
+                <a:solidFill>
+                  <a:srgbClr val="000066"/>
+                </a:solidFill>
+                <a:latin typeface="微軟正黑體" pitchFamily="34" charset="-120"/>
+                <a:ea typeface="微軟正黑體" pitchFamily="34" charset="-120"/>
+              </a:rPr>
+              <a:t>超越全地  一切被造萬物</a:t>
+            </a:r>
+          </a:p>
+        </p:txBody>
+      </p:sp>
+      <p:sp>
+        <p:nvSpPr>
+          <p:cNvPr id="3" name="TextBox 2">
+            <a:extLst>
+              <a:ext uri="{FF2B5EF4-FFF2-40B4-BE49-F238E27FC236}">
+                <a16:creationId xmlns:a16="http://schemas.microsoft.com/office/drawing/2014/main" id="{FA175DD0-F211-14DE-420F-4A50F79B6BD2}"/>
+              </a:ext>
+            </a:extLst>
+          </p:cNvPr>
+          <p:cNvSpPr txBox="1"/>
+          <p:nvPr/>
+        </p:nvSpPr>
+        <p:spPr>
+          <a:xfrm>
+            <a:off x="0" y="5157194"/>
+            <a:ext cx="12192000" cy="584775"/>
+          </a:xfrm>
+          <a:prstGeom prst="rect">
+            <a:avLst/>
+          </a:prstGeom>
+          <a:noFill/>
+        </p:spPr>
+        <p:txBody>
+          <a:bodyPr wrap="square" rtlCol="0">
+            <a:spAutoFit/>
+          </a:bodyPr>
+          <a:lstStyle/>
+          <a:p>
+            <a:pPr algn="ctr"/>
+            <a:r>
+              <a:rPr lang="en-US" sz="3200" b="1" dirty="0">
+                <a:solidFill>
+                  <a:srgbClr val="000066"/>
+                </a:solidFill>
+                <a:latin typeface="Microsoft JhengHei" panose="020B0604030504040204" pitchFamily="34" charset="-120"/>
+                <a:ea typeface="Microsoft JhengHei" panose="020B0604030504040204" pitchFamily="34" charset="-120"/>
+              </a:rPr>
+              <a:t>( </a:t>
+            </a:r>
+            <a:r>
+              <a:rPr lang="zh-CN" altLang="en-US" sz="3200" b="1" dirty="0">
+                <a:solidFill>
+                  <a:srgbClr val="000066"/>
+                </a:solidFill>
+                <a:latin typeface="Microsoft JhengHei" panose="020B0604030504040204" pitchFamily="34" charset="-120"/>
+                <a:ea typeface="Microsoft JhengHei" panose="020B0604030504040204" pitchFamily="34" charset="-120"/>
+              </a:rPr>
+              <a:t>正歌</a:t>
+            </a:r>
+            <a:r>
+              <a:rPr lang="en-US" sz="3200" b="1" dirty="0">
+                <a:solidFill>
+                  <a:srgbClr val="000066"/>
+                </a:solidFill>
+                <a:latin typeface="Microsoft JhengHei" panose="020B0604030504040204" pitchFamily="34" charset="-120"/>
+                <a:ea typeface="Microsoft JhengHei" panose="020B0604030504040204" pitchFamily="34" charset="-120"/>
+              </a:rPr>
+              <a:t> )</a:t>
+            </a:r>
+            <a:endParaRPr lang="vi-VN" sz="3200" b="1" dirty="0">
+              <a:solidFill>
+                <a:srgbClr val="000066"/>
+              </a:solidFill>
+              <a:ea typeface="Microsoft JhengHei" panose="020B0604030504040204" pitchFamily="34" charset="-120"/>
+            </a:endParaRPr>
           </a:p>
         </p:txBody>
       </p:sp>
     </p:spTree>
+    <p:extLst>
+      <p:ext uri="{BB962C8B-B14F-4D97-AF65-F5344CB8AC3E}">
+        <p14:creationId xmlns:p14="http://schemas.microsoft.com/office/powerpoint/2010/main" val="791796712"/>
+      </p:ext>
+    </p:extLst>
   </p:cSld>
   <p:clrMapOvr>
     <a:masterClrMapping/>
@@ -3633,7 +3359,13 @@
   <p:cSld>
     <p:spTree>
       <p:nvGrpSpPr>
-        <p:cNvPr id="1" name=""/>
+        <p:cNvPr id="1" name="">
+          <a:extLst>
+            <a:ext uri="{FF2B5EF4-FFF2-40B4-BE49-F238E27FC236}">
+              <a16:creationId xmlns:a16="http://schemas.microsoft.com/office/drawing/2014/main" id="{D0DCCB31-4357-FD49-1A3E-3808F9711F70}"/>
+            </a:ext>
+          </a:extLst>
+        </p:cNvPr>
         <p:cNvGrpSpPr/>
         <p:nvPr/>
       </p:nvGrpSpPr>
@@ -3647,29 +3379,13 @@
       </p:grpSpPr>
       <p:sp>
         <p:nvSpPr>
-          <p:cNvPr id="4" name="標題 3"/>
-          <p:cNvSpPr>
-            <a:spLocks noGrp="1"/>
-          </p:cNvSpPr>
-          <p:nvPr>
-            <p:ph type="title"/>
-          </p:nvPr>
-        </p:nvSpPr>
-        <p:spPr/>
-        <p:txBody>
-          <a:bodyPr/>
-          <a:lstStyle/>
-          <a:p>
-            <a:r>
-              <a:rPr lang="zh-TW" altLang="en-US" dirty="0"/>
-              <a:t>神羔羊</a:t>
-            </a:r>
-          </a:p>
-        </p:txBody>
-      </p:sp>
-      <p:sp>
-        <p:nvSpPr>
-          <p:cNvPr id="5" name="內容版面配置區 4"/>
+          <p:cNvPr id="5" name="內容版面配置區 4">
+            <a:extLst>
+              <a:ext uri="{FF2B5EF4-FFF2-40B4-BE49-F238E27FC236}">
+                <a16:creationId xmlns:a16="http://schemas.microsoft.com/office/drawing/2014/main" id="{C4C831B6-27B4-2B0C-6A92-4C244D71B2E9}"/>
+              </a:ext>
+            </a:extLst>
+          </p:cNvPr>
           <p:cNvSpPr>
             <a:spLocks noGrp="1"/>
           </p:cNvSpPr>
@@ -3679,12 +3395,12 @@
         </p:nvSpPr>
         <p:spPr>
           <a:xfrm>
-            <a:off x="457200" y="1600200"/>
-            <a:ext cx="8229600" cy="5257800"/>
+            <a:off x="0" y="2084853"/>
+            <a:ext cx="12192000" cy="2404863"/>
           </a:xfrm>
         </p:spPr>
         <p:txBody>
-          <a:bodyPr>
+          <a:bodyPr anchor="ctr">
             <a:normAutofit/>
           </a:bodyPr>
           <a:lstStyle/>
@@ -3693,93 +3409,759 @@
               <a:buNone/>
             </a:pPr>
             <a:r>
-              <a:rPr lang="zh-TW" altLang="en-US" sz="5400" dirty="0"/>
-              <a:t>神</a:t>
-            </a:r>
-            <a:r>
-              <a:rPr lang="zh-TW" altLang="en-US" sz="5400" dirty="0" smtClean="0"/>
-              <a:t>羔羊  寶</a:t>
-            </a:r>
-            <a:r>
-              <a:rPr lang="zh-TW" altLang="en-US" sz="5400" dirty="0"/>
-              <a:t>血為我</a:t>
-            </a:r>
-            <a:r>
-              <a:rPr lang="zh-TW" altLang="en-US" sz="5400" dirty="0" smtClean="0"/>
-              <a:t>流</a:t>
-            </a:r>
-            <a:endParaRPr lang="en-US" altLang="zh-TW" sz="5400" dirty="0" smtClean="0"/>
+              <a:rPr lang="zh-TW" altLang="en-US" sz="6400" b="1" dirty="0">
+                <a:solidFill>
+                  <a:srgbClr val="000066"/>
+                </a:solidFill>
+                <a:latin typeface="微軟正黑體" pitchFamily="34" charset="-120"/>
+                <a:ea typeface="微軟正黑體" pitchFamily="34" charset="-120"/>
+              </a:rPr>
+              <a:t>至高智慧  高過人的道路</a:t>
+            </a:r>
           </a:p>
           <a:p>
             <a:pPr algn="ctr">
               <a:buNone/>
             </a:pPr>
             <a:r>
-              <a:rPr lang="zh-TW" altLang="en-US" sz="5400" dirty="0" smtClean="0"/>
-              <a:t>勝死亡  榮耀</a:t>
-            </a:r>
-            <a:r>
-              <a:rPr lang="zh-TW" altLang="en-US" sz="5400" dirty="0"/>
-              <a:t>地</a:t>
-            </a:r>
-            <a:r>
-              <a:rPr lang="zh-TW" altLang="en-US" sz="5400" dirty="0" smtClean="0"/>
-              <a:t>復活</a:t>
-            </a:r>
-            <a:endParaRPr lang="en-US" altLang="zh-TW" sz="5400" dirty="0"/>
-          </a:p>
+              <a:rPr lang="zh-TW" altLang="en-US" sz="6400" b="1" dirty="0">
+                <a:solidFill>
+                  <a:srgbClr val="000066"/>
+                </a:solidFill>
+                <a:latin typeface="微軟正黑體" pitchFamily="34" charset="-120"/>
+                <a:ea typeface="微軟正黑體" pitchFamily="34" charset="-120"/>
+              </a:rPr>
+              <a:t>唯有祢是  全知權能神</a:t>
+            </a:r>
+          </a:p>
+        </p:txBody>
+      </p:sp>
+      <p:sp>
+        <p:nvSpPr>
+          <p:cNvPr id="3" name="TextBox 2">
+            <a:extLst>
+              <a:ext uri="{FF2B5EF4-FFF2-40B4-BE49-F238E27FC236}">
+                <a16:creationId xmlns:a16="http://schemas.microsoft.com/office/drawing/2014/main" id="{223B262A-80D8-D17B-7FD1-77A179B70D40}"/>
+              </a:ext>
+            </a:extLst>
+          </p:cNvPr>
+          <p:cNvSpPr txBox="1"/>
+          <p:nvPr/>
+        </p:nvSpPr>
+        <p:spPr>
+          <a:xfrm>
+            <a:off x="0" y="5157194"/>
+            <a:ext cx="12192000" cy="584775"/>
+          </a:xfrm>
+          <a:prstGeom prst="rect">
+            <a:avLst/>
+          </a:prstGeom>
+          <a:noFill/>
+        </p:spPr>
+        <p:txBody>
+          <a:bodyPr wrap="square" rtlCol="0">
+            <a:spAutoFit/>
+          </a:bodyPr>
+          <a:lstStyle/>
+          <a:p>
+            <a:pPr algn="ctr"/>
+            <a:r>
+              <a:rPr lang="en-US" sz="3200" b="1" dirty="0">
+                <a:solidFill>
+                  <a:srgbClr val="000066"/>
+                </a:solidFill>
+                <a:latin typeface="Microsoft JhengHei" panose="020B0604030504040204" pitchFamily="34" charset="-120"/>
+                <a:ea typeface="Microsoft JhengHei" panose="020B0604030504040204" pitchFamily="34" charset="-120"/>
+              </a:rPr>
+              <a:t>( </a:t>
+            </a:r>
+            <a:r>
+              <a:rPr lang="zh-CN" altLang="en-US" sz="3200" b="1" dirty="0">
+                <a:solidFill>
+                  <a:srgbClr val="000066"/>
+                </a:solidFill>
+                <a:latin typeface="Microsoft JhengHei" panose="020B0604030504040204" pitchFamily="34" charset="-120"/>
+                <a:ea typeface="Microsoft JhengHei" panose="020B0604030504040204" pitchFamily="34" charset="-120"/>
+              </a:rPr>
+              <a:t>正歌</a:t>
+            </a:r>
+            <a:r>
+              <a:rPr lang="en-US" sz="3200" b="1" dirty="0">
+                <a:solidFill>
+                  <a:srgbClr val="000066"/>
+                </a:solidFill>
+                <a:latin typeface="Microsoft JhengHei" panose="020B0604030504040204" pitchFamily="34" charset="-120"/>
+                <a:ea typeface="Microsoft JhengHei" panose="020B0604030504040204" pitchFamily="34" charset="-120"/>
+              </a:rPr>
+              <a:t> )</a:t>
+            </a:r>
+            <a:endParaRPr lang="vi-VN" sz="3200" b="1" dirty="0">
+              <a:solidFill>
+                <a:srgbClr val="000066"/>
+              </a:solidFill>
+              <a:ea typeface="Microsoft JhengHei" panose="020B0604030504040204" pitchFamily="34" charset="-120"/>
+            </a:endParaRPr>
+          </a:p>
+        </p:txBody>
+      </p:sp>
+    </p:spTree>
+    <p:extLst>
+      <p:ext uri="{BB962C8B-B14F-4D97-AF65-F5344CB8AC3E}">
+        <p14:creationId xmlns:p14="http://schemas.microsoft.com/office/powerpoint/2010/main" val="2858930692"/>
+      </p:ext>
+    </p:extLst>
+  </p:cSld>
+  <p:clrMapOvr>
+    <a:masterClrMapping/>
+  </p:clrMapOvr>
+</p:sld>
+</file>
+
+<file path=ppt/slides/slide4.xml><?xml version="1.0" encoding="utf-8"?>
+<p:sld xmlns:a="http://schemas.openxmlformats.org/drawingml/2006/main" xmlns:r="http://schemas.openxmlformats.org/officeDocument/2006/relationships" xmlns:p="http://schemas.openxmlformats.org/presentationml/2006/main">
+  <p:cSld>
+    <p:spTree>
+      <p:nvGrpSpPr>
+        <p:cNvPr id="1" name="">
+          <a:extLst>
+            <a:ext uri="{FF2B5EF4-FFF2-40B4-BE49-F238E27FC236}">
+              <a16:creationId xmlns:a16="http://schemas.microsoft.com/office/drawing/2014/main" id="{FA5D735A-1BA7-B58E-1C01-855EDEE42B91}"/>
+            </a:ext>
+          </a:extLst>
+        </p:cNvPr>
+        <p:cNvGrpSpPr/>
+        <p:nvPr/>
+      </p:nvGrpSpPr>
+      <p:grpSpPr>
+        <a:xfrm>
+          <a:off x="0" y="0"/>
+          <a:ext cx="0" cy="0"/>
+          <a:chOff x="0" y="0"/>
+          <a:chExt cx="0" cy="0"/>
+        </a:xfrm>
+      </p:grpSpPr>
+      <p:sp>
+        <p:nvSpPr>
+          <p:cNvPr id="5" name="內容版面配置區 4">
+            <a:extLst>
+              <a:ext uri="{FF2B5EF4-FFF2-40B4-BE49-F238E27FC236}">
+                <a16:creationId xmlns:a16="http://schemas.microsoft.com/office/drawing/2014/main" id="{8058B361-6F69-D383-E6FE-5231573CA5EE}"/>
+              </a:ext>
+            </a:extLst>
+          </p:cNvPr>
+          <p:cNvSpPr>
+            <a:spLocks noGrp="1"/>
+          </p:cNvSpPr>
+          <p:nvPr>
+            <p:ph idx="1"/>
+          </p:nvPr>
+        </p:nvSpPr>
+        <p:spPr>
+          <a:xfrm>
+            <a:off x="0" y="2084853"/>
+            <a:ext cx="12192000" cy="2404863"/>
+          </a:xfrm>
+        </p:spPr>
+        <p:txBody>
+          <a:bodyPr anchor="ctr">
+            <a:normAutofit/>
+          </a:bodyPr>
+          <a:lstStyle/>
           <a:p>
             <a:pPr algn="ctr">
               <a:buNone/>
             </a:pPr>
             <a:r>
-              <a:rPr lang="zh-TW" altLang="en-US" sz="5400" dirty="0" smtClean="0"/>
-              <a:t>耶穌  寶貴</a:t>
-            </a:r>
-            <a:r>
-              <a:rPr lang="zh-TW" altLang="en-US" sz="5400" dirty="0"/>
-              <a:t>神</a:t>
-            </a:r>
-            <a:r>
-              <a:rPr lang="zh-TW" altLang="en-US" sz="5400" dirty="0" smtClean="0"/>
-              <a:t>羔羊</a:t>
-            </a:r>
-            <a:endParaRPr lang="en-US" altLang="zh-TW" sz="5400" dirty="0" smtClean="0"/>
+              <a:rPr lang="zh-TW" altLang="en-US" sz="6400" b="1" dirty="0">
+                <a:solidFill>
+                  <a:srgbClr val="000066"/>
+                </a:solidFill>
+                <a:latin typeface="微軟正黑體" pitchFamily="34" charset="-120"/>
+                <a:ea typeface="微軟正黑體" pitchFamily="34" charset="-120"/>
+              </a:rPr>
+              <a:t>至高國度  至高君</a:t>
+            </a:r>
           </a:p>
           <a:p>
             <a:pPr algn="ctr">
               <a:buNone/>
             </a:pPr>
             <a:r>
-              <a:rPr lang="zh-TW" altLang="en-US" sz="5400" dirty="0" smtClean="0"/>
-              <a:t>為</a:t>
-            </a:r>
-            <a:r>
-              <a:rPr lang="zh-TW" altLang="en-US" sz="5400" dirty="0"/>
-              <a:t>我受死，為我</a:t>
-            </a:r>
-            <a:r>
-              <a:rPr lang="zh-TW" altLang="en-US" sz="5400" dirty="0" smtClean="0"/>
-              <a:t>復活</a:t>
-            </a:r>
-            <a:endParaRPr lang="en-US" altLang="zh-TW" sz="5400" dirty="0" smtClean="0"/>
-          </a:p>
+              <a:rPr lang="zh-TW" altLang="en-US" sz="6400" b="1" dirty="0">
+                <a:solidFill>
+                  <a:srgbClr val="000066"/>
+                </a:solidFill>
+                <a:latin typeface="微軟正黑體" pitchFamily="34" charset="-120"/>
+                <a:ea typeface="微軟正黑體" pitchFamily="34" charset="-120"/>
+              </a:rPr>
+              <a:t>超越全地  一切奇妙豐富</a:t>
+            </a:r>
+          </a:p>
+        </p:txBody>
+      </p:sp>
+      <p:sp>
+        <p:nvSpPr>
+          <p:cNvPr id="3" name="TextBox 2">
+            <a:extLst>
+              <a:ext uri="{FF2B5EF4-FFF2-40B4-BE49-F238E27FC236}">
+                <a16:creationId xmlns:a16="http://schemas.microsoft.com/office/drawing/2014/main" id="{95399160-C520-7314-7582-0683E7CD6A7A}"/>
+              </a:ext>
+            </a:extLst>
+          </p:cNvPr>
+          <p:cNvSpPr txBox="1"/>
+          <p:nvPr/>
+        </p:nvSpPr>
+        <p:spPr>
+          <a:xfrm>
+            <a:off x="0" y="5157194"/>
+            <a:ext cx="12192000" cy="584775"/>
+          </a:xfrm>
+          <a:prstGeom prst="rect">
+            <a:avLst/>
+          </a:prstGeom>
+          <a:noFill/>
+        </p:spPr>
+        <p:txBody>
+          <a:bodyPr wrap="square" rtlCol="0">
+            <a:spAutoFit/>
+          </a:bodyPr>
+          <a:lstStyle/>
+          <a:p>
+            <a:pPr algn="ctr"/>
+            <a:r>
+              <a:rPr lang="en-US" sz="3200" b="1" dirty="0">
+                <a:solidFill>
+                  <a:srgbClr val="000066"/>
+                </a:solidFill>
+                <a:latin typeface="Microsoft JhengHei" panose="020B0604030504040204" pitchFamily="34" charset="-120"/>
+                <a:ea typeface="Microsoft JhengHei" panose="020B0604030504040204" pitchFamily="34" charset="-120"/>
+              </a:rPr>
+              <a:t>( </a:t>
+            </a:r>
+            <a:r>
+              <a:rPr lang="zh-CN" altLang="en-US" sz="3200" b="1" dirty="0">
+                <a:solidFill>
+                  <a:srgbClr val="000066"/>
+                </a:solidFill>
+                <a:latin typeface="Microsoft JhengHei" panose="020B0604030504040204" pitchFamily="34" charset="-120"/>
+                <a:ea typeface="Microsoft JhengHei" panose="020B0604030504040204" pitchFamily="34" charset="-120"/>
+              </a:rPr>
+              <a:t>正歌</a:t>
+            </a:r>
+            <a:r>
+              <a:rPr lang="en-US" sz="3200" b="1" dirty="0">
+                <a:solidFill>
+                  <a:srgbClr val="000066"/>
+                </a:solidFill>
+                <a:latin typeface="Microsoft JhengHei" panose="020B0604030504040204" pitchFamily="34" charset="-120"/>
+                <a:ea typeface="Microsoft JhengHei" panose="020B0604030504040204" pitchFamily="34" charset="-120"/>
+              </a:rPr>
+              <a:t> )</a:t>
+            </a:r>
+            <a:endParaRPr lang="vi-VN" sz="3200" b="1" dirty="0">
+              <a:solidFill>
+                <a:srgbClr val="000066"/>
+              </a:solidFill>
+              <a:ea typeface="Microsoft JhengHei" panose="020B0604030504040204" pitchFamily="34" charset="-120"/>
+            </a:endParaRPr>
+          </a:p>
+        </p:txBody>
+      </p:sp>
+    </p:spTree>
+    <p:extLst>
+      <p:ext uri="{BB962C8B-B14F-4D97-AF65-F5344CB8AC3E}">
+        <p14:creationId xmlns:p14="http://schemas.microsoft.com/office/powerpoint/2010/main" val="3544749863"/>
+      </p:ext>
+    </p:extLst>
+  </p:cSld>
+  <p:clrMapOvr>
+    <a:masterClrMapping/>
+  </p:clrMapOvr>
+</p:sld>
+</file>
+
+<file path=ppt/slides/slide5.xml><?xml version="1.0" encoding="utf-8"?>
+<p:sld xmlns:a="http://schemas.openxmlformats.org/drawingml/2006/main" xmlns:r="http://schemas.openxmlformats.org/officeDocument/2006/relationships" xmlns:p="http://schemas.openxmlformats.org/presentationml/2006/main">
+  <p:cSld>
+    <p:spTree>
+      <p:nvGrpSpPr>
+        <p:cNvPr id="1" name="">
+          <a:extLst>
+            <a:ext uri="{FF2B5EF4-FFF2-40B4-BE49-F238E27FC236}">
+              <a16:creationId xmlns:a16="http://schemas.microsoft.com/office/drawing/2014/main" id="{A9AD21FE-786E-4059-97F7-42E2A6C8892D}"/>
+            </a:ext>
+          </a:extLst>
+        </p:cNvPr>
+        <p:cNvGrpSpPr/>
+        <p:nvPr/>
+      </p:nvGrpSpPr>
+      <p:grpSpPr>
+        <a:xfrm>
+          <a:off x="0" y="0"/>
+          <a:ext cx="0" cy="0"/>
+          <a:chOff x="0" y="0"/>
+          <a:chExt cx="0" cy="0"/>
+        </a:xfrm>
+      </p:grpSpPr>
+      <p:sp>
+        <p:nvSpPr>
+          <p:cNvPr id="5" name="內容版面配置區 4">
+            <a:extLst>
+              <a:ext uri="{FF2B5EF4-FFF2-40B4-BE49-F238E27FC236}">
+                <a16:creationId xmlns:a16="http://schemas.microsoft.com/office/drawing/2014/main" id="{FE8A179A-4D5D-8975-F250-452FFE59FD0D}"/>
+              </a:ext>
+            </a:extLst>
+          </p:cNvPr>
+          <p:cNvSpPr>
+            <a:spLocks noGrp="1"/>
+          </p:cNvSpPr>
+          <p:nvPr>
+            <p:ph idx="1"/>
+          </p:nvPr>
+        </p:nvSpPr>
+        <p:spPr>
+          <a:xfrm>
+            <a:off x="0" y="2084853"/>
+            <a:ext cx="12192000" cy="2404863"/>
+          </a:xfrm>
+        </p:spPr>
+        <p:txBody>
+          <a:bodyPr anchor="ctr">
+            <a:normAutofit/>
+          </a:bodyPr>
+          <a:lstStyle/>
           <a:p>
             <a:pPr algn="ctr">
               <a:buNone/>
             </a:pPr>
             <a:r>
-              <a:rPr lang="zh-TW" altLang="en-US" sz="5400" dirty="0" smtClean="0"/>
-              <a:t>神</a:t>
-            </a:r>
-            <a:r>
-              <a:rPr lang="zh-TW" altLang="en-US" sz="5400" dirty="0"/>
-              <a:t>羔羊</a:t>
-            </a:r>
+              <a:rPr lang="zh-TW" altLang="en-US" sz="6400" b="1" dirty="0">
+                <a:solidFill>
+                  <a:srgbClr val="000066"/>
+                </a:solidFill>
+                <a:latin typeface="微軟正黑體" pitchFamily="34" charset="-120"/>
+                <a:ea typeface="微軟正黑體" pitchFamily="34" charset="-120"/>
+              </a:rPr>
+              <a:t>至尊至貴  勝過世界財富</a:t>
+            </a:r>
+          </a:p>
+          <a:p>
+            <a:pPr algn="ctr">
+              <a:buNone/>
+            </a:pPr>
+            <a:r>
+              <a:rPr lang="zh-TW" altLang="en-US" sz="6400" b="1" dirty="0">
+                <a:solidFill>
+                  <a:srgbClr val="000066"/>
+                </a:solidFill>
+                <a:latin typeface="微軟正黑體" pitchFamily="34" charset="-120"/>
+                <a:ea typeface="微軟正黑體" pitchFamily="34" charset="-120"/>
+              </a:rPr>
+              <a:t>天上地下  唯一的愛慕</a:t>
+            </a:r>
+          </a:p>
+        </p:txBody>
+      </p:sp>
+      <p:sp>
+        <p:nvSpPr>
+          <p:cNvPr id="3" name="TextBox 2">
+            <a:extLst>
+              <a:ext uri="{FF2B5EF4-FFF2-40B4-BE49-F238E27FC236}">
+                <a16:creationId xmlns:a16="http://schemas.microsoft.com/office/drawing/2014/main" id="{D113EA1B-31ED-1274-57AD-8934EA785C53}"/>
+              </a:ext>
+            </a:extLst>
+          </p:cNvPr>
+          <p:cNvSpPr txBox="1"/>
+          <p:nvPr/>
+        </p:nvSpPr>
+        <p:spPr>
+          <a:xfrm>
+            <a:off x="0" y="5157194"/>
+            <a:ext cx="12192000" cy="584775"/>
+          </a:xfrm>
+          <a:prstGeom prst="rect">
+            <a:avLst/>
+          </a:prstGeom>
+          <a:noFill/>
+        </p:spPr>
+        <p:txBody>
+          <a:bodyPr wrap="square" rtlCol="0">
+            <a:spAutoFit/>
+          </a:bodyPr>
+          <a:lstStyle/>
+          <a:p>
+            <a:pPr algn="ctr"/>
+            <a:r>
+              <a:rPr lang="en-US" sz="3200" b="1" dirty="0">
+                <a:solidFill>
+                  <a:srgbClr val="000066"/>
+                </a:solidFill>
+                <a:latin typeface="Microsoft JhengHei" panose="020B0604030504040204" pitchFamily="34" charset="-120"/>
+                <a:ea typeface="Microsoft JhengHei" panose="020B0604030504040204" pitchFamily="34" charset="-120"/>
+              </a:rPr>
+              <a:t>( </a:t>
+            </a:r>
+            <a:r>
+              <a:rPr lang="zh-CN" altLang="en-US" sz="3200" b="1" dirty="0">
+                <a:solidFill>
+                  <a:srgbClr val="000066"/>
+                </a:solidFill>
+                <a:latin typeface="Microsoft JhengHei" panose="020B0604030504040204" pitchFamily="34" charset="-120"/>
+                <a:ea typeface="Microsoft JhengHei" panose="020B0604030504040204" pitchFamily="34" charset="-120"/>
+              </a:rPr>
+              <a:t>正歌</a:t>
+            </a:r>
+            <a:r>
+              <a:rPr lang="en-US" sz="3200" b="1" dirty="0">
+                <a:solidFill>
+                  <a:srgbClr val="000066"/>
+                </a:solidFill>
+                <a:latin typeface="Microsoft JhengHei" panose="020B0604030504040204" pitchFamily="34" charset="-120"/>
+                <a:ea typeface="Microsoft JhengHei" panose="020B0604030504040204" pitchFamily="34" charset="-120"/>
+              </a:rPr>
+              <a:t> )</a:t>
+            </a:r>
+            <a:endParaRPr lang="vi-VN" sz="3200" b="1" dirty="0">
+              <a:solidFill>
+                <a:srgbClr val="000066"/>
+              </a:solidFill>
+              <a:ea typeface="Microsoft JhengHei" panose="020B0604030504040204" pitchFamily="34" charset="-120"/>
+            </a:endParaRPr>
           </a:p>
         </p:txBody>
       </p:sp>
     </p:spTree>
+    <p:extLst>
+      <p:ext uri="{BB962C8B-B14F-4D97-AF65-F5344CB8AC3E}">
+        <p14:creationId xmlns:p14="http://schemas.microsoft.com/office/powerpoint/2010/main" val="1729630866"/>
+      </p:ext>
+    </p:extLst>
+  </p:cSld>
+  <p:clrMapOvr>
+    <a:masterClrMapping/>
+  </p:clrMapOvr>
+</p:sld>
+</file>
+
+<file path=ppt/slides/slide6.xml><?xml version="1.0" encoding="utf-8"?>
+<p:sld xmlns:a="http://schemas.openxmlformats.org/drawingml/2006/main" xmlns:r="http://schemas.openxmlformats.org/officeDocument/2006/relationships" xmlns:p="http://schemas.openxmlformats.org/presentationml/2006/main">
+  <p:cSld>
+    <p:spTree>
+      <p:nvGrpSpPr>
+        <p:cNvPr id="1" name="">
+          <a:extLst>
+            <a:ext uri="{FF2B5EF4-FFF2-40B4-BE49-F238E27FC236}">
+              <a16:creationId xmlns:a16="http://schemas.microsoft.com/office/drawing/2014/main" id="{D6C59B23-A086-4A2F-7962-6389FA3FC4B9}"/>
+            </a:ext>
+          </a:extLst>
+        </p:cNvPr>
+        <p:cNvGrpSpPr/>
+        <p:nvPr/>
+      </p:nvGrpSpPr>
+      <p:grpSpPr>
+        <a:xfrm>
+          <a:off x="0" y="0"/>
+          <a:ext cx="0" cy="0"/>
+          <a:chOff x="0" y="0"/>
+          <a:chExt cx="0" cy="0"/>
+        </a:xfrm>
+      </p:grpSpPr>
+      <p:sp>
+        <p:nvSpPr>
+          <p:cNvPr id="5" name="內容版面配置區 4">
+            <a:extLst>
+              <a:ext uri="{FF2B5EF4-FFF2-40B4-BE49-F238E27FC236}">
+                <a16:creationId xmlns:a16="http://schemas.microsoft.com/office/drawing/2014/main" id="{B66FB26F-17D8-8BDD-5E18-83EB07C9FB42}"/>
+              </a:ext>
+            </a:extLst>
+          </p:cNvPr>
+          <p:cNvSpPr>
+            <a:spLocks noGrp="1"/>
+          </p:cNvSpPr>
+          <p:nvPr>
+            <p:ph idx="1"/>
+          </p:nvPr>
+        </p:nvSpPr>
+        <p:spPr>
+          <a:xfrm>
+            <a:off x="0" y="2084853"/>
+            <a:ext cx="12192000" cy="2404863"/>
+          </a:xfrm>
+        </p:spPr>
+        <p:txBody>
+          <a:bodyPr anchor="ctr">
+            <a:normAutofit/>
+          </a:bodyPr>
+          <a:lstStyle/>
+          <a:p>
+            <a:pPr algn="ctr">
+              <a:buNone/>
+            </a:pPr>
+            <a:r>
+              <a:rPr lang="zh-TW" altLang="en-US" sz="6400" b="1" dirty="0">
+                <a:solidFill>
+                  <a:srgbClr val="000066"/>
+                </a:solidFill>
+                <a:latin typeface="微軟正黑體" pitchFamily="34" charset="-120"/>
+                <a:ea typeface="微軟正黑體" pitchFamily="34" charset="-120"/>
+              </a:rPr>
+              <a:t>神羔羊  寶血為我流</a:t>
+            </a:r>
+          </a:p>
+          <a:p>
+            <a:pPr algn="ctr">
+              <a:buNone/>
+            </a:pPr>
+            <a:r>
+              <a:rPr lang="zh-TW" altLang="en-US" sz="6400" b="1" dirty="0">
+                <a:solidFill>
+                  <a:srgbClr val="000066"/>
+                </a:solidFill>
+                <a:latin typeface="微軟正黑體" pitchFamily="34" charset="-120"/>
+                <a:ea typeface="微軟正黑體" pitchFamily="34" charset="-120"/>
+              </a:rPr>
+              <a:t>勝死亡  榮耀地復活</a:t>
+            </a:r>
+          </a:p>
+        </p:txBody>
+      </p:sp>
+      <p:sp>
+        <p:nvSpPr>
+          <p:cNvPr id="3" name="TextBox 2">
+            <a:extLst>
+              <a:ext uri="{FF2B5EF4-FFF2-40B4-BE49-F238E27FC236}">
+                <a16:creationId xmlns:a16="http://schemas.microsoft.com/office/drawing/2014/main" id="{8530C04F-9E42-A251-3E6E-46F580B76C73}"/>
+              </a:ext>
+            </a:extLst>
+          </p:cNvPr>
+          <p:cNvSpPr txBox="1"/>
+          <p:nvPr/>
+        </p:nvSpPr>
+        <p:spPr>
+          <a:xfrm>
+            <a:off x="0" y="5157194"/>
+            <a:ext cx="12192000" cy="584775"/>
+          </a:xfrm>
+          <a:prstGeom prst="rect">
+            <a:avLst/>
+          </a:prstGeom>
+          <a:noFill/>
+        </p:spPr>
+        <p:txBody>
+          <a:bodyPr wrap="square" rtlCol="0">
+            <a:spAutoFit/>
+          </a:bodyPr>
+          <a:lstStyle/>
+          <a:p>
+            <a:pPr algn="ctr"/>
+            <a:r>
+              <a:rPr lang="en-US" sz="3200" b="1" dirty="0">
+                <a:solidFill>
+                  <a:srgbClr val="000066"/>
+                </a:solidFill>
+                <a:latin typeface="Microsoft JhengHei" panose="020B0604030504040204" pitchFamily="34" charset="-120"/>
+                <a:ea typeface="Microsoft JhengHei" panose="020B0604030504040204" pitchFamily="34" charset="-120"/>
+              </a:rPr>
+              <a:t>( </a:t>
+            </a:r>
+            <a:r>
+              <a:rPr lang="zh-CN" altLang="en-US" sz="3200" b="1" dirty="0">
+                <a:solidFill>
+                  <a:srgbClr val="000066"/>
+                </a:solidFill>
+                <a:latin typeface="Microsoft JhengHei" panose="020B0604030504040204" pitchFamily="34" charset="-120"/>
+                <a:ea typeface="Microsoft JhengHei" panose="020B0604030504040204" pitchFamily="34" charset="-120"/>
+              </a:rPr>
+              <a:t>副歌</a:t>
+            </a:r>
+            <a:r>
+              <a:rPr lang="en-US" sz="3200" b="1" dirty="0">
+                <a:solidFill>
+                  <a:srgbClr val="000066"/>
+                </a:solidFill>
+                <a:latin typeface="Microsoft JhengHei" panose="020B0604030504040204" pitchFamily="34" charset="-120"/>
+                <a:ea typeface="Microsoft JhengHei" panose="020B0604030504040204" pitchFamily="34" charset="-120"/>
+              </a:rPr>
+              <a:t> )</a:t>
+            </a:r>
+            <a:endParaRPr lang="vi-VN" sz="3200" b="1" dirty="0">
+              <a:solidFill>
+                <a:srgbClr val="000066"/>
+              </a:solidFill>
+              <a:ea typeface="Microsoft JhengHei" panose="020B0604030504040204" pitchFamily="34" charset="-120"/>
+            </a:endParaRPr>
+          </a:p>
+        </p:txBody>
+      </p:sp>
+    </p:spTree>
+    <p:extLst>
+      <p:ext uri="{BB962C8B-B14F-4D97-AF65-F5344CB8AC3E}">
+        <p14:creationId xmlns:p14="http://schemas.microsoft.com/office/powerpoint/2010/main" val="2426575097"/>
+      </p:ext>
+    </p:extLst>
+  </p:cSld>
+  <p:clrMapOvr>
+    <a:masterClrMapping/>
+  </p:clrMapOvr>
+</p:sld>
+</file>
+
+<file path=ppt/slides/slide7.xml><?xml version="1.0" encoding="utf-8"?>
+<p:sld xmlns:a="http://schemas.openxmlformats.org/drawingml/2006/main" xmlns:r="http://schemas.openxmlformats.org/officeDocument/2006/relationships" xmlns:p="http://schemas.openxmlformats.org/presentationml/2006/main">
+  <p:cSld>
+    <p:spTree>
+      <p:nvGrpSpPr>
+        <p:cNvPr id="1" name="">
+          <a:extLst>
+            <a:ext uri="{FF2B5EF4-FFF2-40B4-BE49-F238E27FC236}">
+              <a16:creationId xmlns:a16="http://schemas.microsoft.com/office/drawing/2014/main" id="{0D3BE5D3-0752-7FA9-BBF7-AA3EF3685FBD}"/>
+            </a:ext>
+          </a:extLst>
+        </p:cNvPr>
+        <p:cNvGrpSpPr/>
+        <p:nvPr/>
+      </p:nvGrpSpPr>
+      <p:grpSpPr>
+        <a:xfrm>
+          <a:off x="0" y="0"/>
+          <a:ext cx="0" cy="0"/>
+          <a:chOff x="0" y="0"/>
+          <a:chExt cx="0" cy="0"/>
+        </a:xfrm>
+      </p:grpSpPr>
+      <p:sp>
+        <p:nvSpPr>
+          <p:cNvPr id="5" name="內容版面配置區 4">
+            <a:extLst>
+              <a:ext uri="{FF2B5EF4-FFF2-40B4-BE49-F238E27FC236}">
+                <a16:creationId xmlns:a16="http://schemas.microsoft.com/office/drawing/2014/main" id="{7322F97A-0B7C-89A3-58BB-95FC467E6550}"/>
+              </a:ext>
+            </a:extLst>
+          </p:cNvPr>
+          <p:cNvSpPr>
+            <a:spLocks noGrp="1"/>
+          </p:cNvSpPr>
+          <p:nvPr>
+            <p:ph idx="1"/>
+          </p:nvPr>
+        </p:nvSpPr>
+        <p:spPr>
+          <a:xfrm>
+            <a:off x="0" y="2084853"/>
+            <a:ext cx="12192000" cy="2404863"/>
+          </a:xfrm>
+        </p:spPr>
+        <p:txBody>
+          <a:bodyPr anchor="ctr">
+            <a:normAutofit/>
+          </a:bodyPr>
+          <a:lstStyle/>
+          <a:p>
+            <a:pPr algn="ctr">
+              <a:buNone/>
+            </a:pPr>
+            <a:r>
+              <a:rPr lang="zh-TW" altLang="en-US" sz="6400" b="1" dirty="0">
+                <a:solidFill>
+                  <a:srgbClr val="000066"/>
+                </a:solidFill>
+                <a:latin typeface="微軟正黑體" pitchFamily="34" charset="-120"/>
+                <a:ea typeface="微軟正黑體" pitchFamily="34" charset="-120"/>
+              </a:rPr>
+              <a:t>耶穌  寶貴神羔羊</a:t>
+            </a:r>
+          </a:p>
+          <a:p>
+            <a:pPr algn="ctr">
+              <a:buNone/>
+            </a:pPr>
+            <a:r>
+              <a:rPr lang="zh-TW" altLang="en-US" sz="6400" b="1" dirty="0">
+                <a:solidFill>
+                  <a:srgbClr val="000066"/>
+                </a:solidFill>
+                <a:latin typeface="微軟正黑體" pitchFamily="34" charset="-120"/>
+                <a:ea typeface="微軟正黑體" pitchFamily="34" charset="-120"/>
+              </a:rPr>
+              <a:t>為我受死  為我復活  神羔羊</a:t>
+            </a:r>
+          </a:p>
+        </p:txBody>
+      </p:sp>
+      <p:sp>
+        <p:nvSpPr>
+          <p:cNvPr id="3" name="TextBox 2">
+            <a:extLst>
+              <a:ext uri="{FF2B5EF4-FFF2-40B4-BE49-F238E27FC236}">
+                <a16:creationId xmlns:a16="http://schemas.microsoft.com/office/drawing/2014/main" id="{904C99DD-D942-12A2-C961-9969D1BEC8D1}"/>
+              </a:ext>
+            </a:extLst>
+          </p:cNvPr>
+          <p:cNvSpPr txBox="1"/>
+          <p:nvPr/>
+        </p:nvSpPr>
+        <p:spPr>
+          <a:xfrm>
+            <a:off x="0" y="5157194"/>
+            <a:ext cx="12192000" cy="584775"/>
+          </a:xfrm>
+          <a:prstGeom prst="rect">
+            <a:avLst/>
+          </a:prstGeom>
+          <a:noFill/>
+        </p:spPr>
+        <p:txBody>
+          <a:bodyPr wrap="square" rtlCol="0">
+            <a:spAutoFit/>
+          </a:bodyPr>
+          <a:lstStyle/>
+          <a:p>
+            <a:pPr algn="ctr"/>
+            <a:r>
+              <a:rPr lang="en-US" sz="3200" b="1" dirty="0">
+                <a:solidFill>
+                  <a:srgbClr val="000066"/>
+                </a:solidFill>
+                <a:latin typeface="Microsoft JhengHei" panose="020B0604030504040204" pitchFamily="34" charset="-120"/>
+                <a:ea typeface="Microsoft JhengHei" panose="020B0604030504040204" pitchFamily="34" charset="-120"/>
+              </a:rPr>
+              <a:t>( </a:t>
+            </a:r>
+            <a:r>
+              <a:rPr lang="zh-CN" altLang="en-US" sz="3200" b="1" dirty="0">
+                <a:solidFill>
+                  <a:srgbClr val="000066"/>
+                </a:solidFill>
+                <a:latin typeface="Microsoft JhengHei" panose="020B0604030504040204" pitchFamily="34" charset="-120"/>
+                <a:ea typeface="Microsoft JhengHei" panose="020B0604030504040204" pitchFamily="34" charset="-120"/>
+              </a:rPr>
+              <a:t>副歌</a:t>
+            </a:r>
+            <a:r>
+              <a:rPr lang="en-US" sz="3200" b="1" dirty="0">
+                <a:solidFill>
+                  <a:srgbClr val="000066"/>
+                </a:solidFill>
+                <a:latin typeface="Microsoft JhengHei" panose="020B0604030504040204" pitchFamily="34" charset="-120"/>
+                <a:ea typeface="Microsoft JhengHei" panose="020B0604030504040204" pitchFamily="34" charset="-120"/>
+              </a:rPr>
+              <a:t> )</a:t>
+            </a:r>
+            <a:endParaRPr lang="vi-VN" sz="3200" b="1" dirty="0">
+              <a:solidFill>
+                <a:srgbClr val="000066"/>
+              </a:solidFill>
+              <a:ea typeface="Microsoft JhengHei" panose="020B0604030504040204" pitchFamily="34" charset="-120"/>
+            </a:endParaRPr>
+          </a:p>
+        </p:txBody>
+      </p:sp>
+    </p:spTree>
+    <p:extLst>
+      <p:ext uri="{BB962C8B-B14F-4D97-AF65-F5344CB8AC3E}">
+        <p14:creationId xmlns:p14="http://schemas.microsoft.com/office/powerpoint/2010/main" val="796178011"/>
+      </p:ext>
+    </p:extLst>
   </p:cSld>
   <p:clrMapOvr>
     <a:masterClrMapping/>
@@ -3788,7 +4170,7 @@
 </file>
 
 <file path=ppt/theme/theme1.xml><?xml version="1.0" encoding="utf-8"?>
-<a:theme xmlns:a="http://schemas.openxmlformats.org/drawingml/2006/main" name="佈景主題7">
+<a:theme xmlns:a="http://schemas.openxmlformats.org/drawingml/2006/main" name="Theme1">
   <a:themeElements>
     <a:clrScheme name="Office">
       <a:dk1>
@@ -4067,5 +4449,10 @@
   </a:themeElements>
   <a:objectDefaults/>
   <a:extraClrSchemeLst/>
+  <a:extLst>
+    <a:ext uri="{05A4C25C-085E-4340-85A3-A5531E510DB2}">
+      <thm15:themeFamily xmlns:thm15="http://schemas.microsoft.com/office/thememl/2012/main" name="Theme1" id="{75BBF97F-0525-4D7F-ABA1-4CCFA07F43A2}" vid="{8D3552C7-B8E4-422B-9896-C8F00D815D11}"/>
+    </a:ext>
+  </a:extLst>
 </a:theme>
 </file>